--- a/output/sdr-weather-alerts/presentation/SDR_research_progress_jp.pptx
+++ b/output/sdr-weather-alerts/presentation/SDR_research_progress_jp.pptx
@@ -15,6 +15,8 @@
     <p:sldId id="263" r:id="rId15"/>
     <p:sldId id="264" r:id="rId16"/>
     <p:sldId id="265" r:id="rId17"/>
+    <p:sldId id="266" r:id="rId18"/>
+    <p:sldId id="267" r:id="rId19"/>
   </p:sldIdLst>
   <p:sldSz cx="12191695" cy="6858000" type="screen4x3"/>
   <p:notesSz cx="6858000" cy="9144000"/>
@@ -606,6 +608,196 @@
           <a:lstStyle/>
           <a:p>
             <a:r>
+              <a:t>次に散布図とアーキテクチャ比較です。</a:t>
+            </a:r>
+          </a:p>
+          <a:p>
+            <a:r>
+              <a:t>左の散布図では、点が対角線 y=x に沿って分布しており、予測値と実測値がよく一致していることが分かります。</a:t>
+            </a:r>
+          </a:p>
+          <a:p>
+            <a:r>
+              <a:t>右の表は、3つの手法を比較したものです。</a:t>
+            </a:r>
+          </a:p>
+          <a:p>
+            <a:r>
+              <a:t>A は観測値のみを使う理論上限、B は予報値のみを使う従来手法、そして C が本研究のハイブリッド手法です。</a:t>
+            </a:r>
+          </a:p>
+          <a:p>
+            <a:r>
+              <a:t>Cは B より MAE が 10% 改善し、A との差はわずか 6% です。</a:t>
+            </a:r>
+          </a:p>
+          <a:p>
+            <a:r>
+              <a:t>つまり、観測値を使った理論上限に近い精度を、実運用で実現できたということです。</a:t>
+            </a:r>
+          </a:p>
+        </p:txBody>
+      </p:sp>
+      <p:sp>
+        <p:nvSpPr>
+          <p:cNvPr id="4" name="Slide Number Placeholder 3"/>
+          <p:cNvSpPr>
+            <a:spLocks noGrp="1"/>
+          </p:cNvSpPr>
+          <p:nvPr>
+            <p:ph type="sldNum" idx="5" sz="quarter"/>
+          </p:nvPr>
+        </p:nvSpPr>
+        <p:spPr/>
+      </p:sp>
+    </p:spTree>
+  </p:cSld>
+  <p:clrMapOvr>
+    <a:masterClrMapping/>
+  </p:clrMapOvr>
+</p:notes>
+</file>
+
+<file path=ppt/notesSlides/notesSlide11.xml><?xml version="1.0" encoding="utf-8"?>
+<p:notes xmlns:a="http://schemas.openxmlformats.org/drawingml/2006/main" xmlns:p="http://schemas.openxmlformats.org/presentationml/2006/main" xmlns:r="http://schemas.openxmlformats.org/officeDocument/2006/relationships">
+  <p:cSld>
+    <p:spTree>
+      <p:nvGrpSpPr>
+        <p:cNvPr id="1" name=""/>
+        <p:cNvGrpSpPr/>
+        <p:nvPr/>
+      </p:nvGrpSpPr>
+      <p:grpSpPr>
+        <a:xfrm>
+          <a:off x="0" y="0"/>
+          <a:ext cx="0" cy="0"/>
+          <a:chOff x="0" y="0"/>
+          <a:chExt cx="0" cy="0"/>
+        </a:xfrm>
+      </p:grpSpPr>
+      <p:sp>
+        <p:nvSpPr>
+          <p:cNvPr id="2" name="Slide Image Placeholder 1"/>
+          <p:cNvSpPr>
+            <a:spLocks noGrp="1"/>
+          </p:cNvSpPr>
+          <p:nvPr>
+            <p:ph type="sldImg" idx="2"/>
+          </p:nvPr>
+        </p:nvSpPr>
+        <p:spPr/>
+      </p:sp>
+      <p:sp>
+        <p:nvSpPr>
+          <p:cNvPr id="3" name="Notes Placeholder 2"/>
+          <p:cNvSpPr>
+            <a:spLocks noGrp="1"/>
+          </p:cNvSpPr>
+          <p:nvPr>
+            <p:ph type="body" idx="3" sz="quarter"/>
+          </p:nvPr>
+        </p:nvSpPr>
+        <p:spPr/>
+        <p:txBody>
+          <a:bodyPr/>
+          <a:lstStyle/>
+          <a:p>
+            <a:r>
+              <a:t>こちらが予測の根拠となる特徴量です。SHAP値で重要度を可視化しました。</a:t>
+            </a:r>
+          </a:p>
+          <a:p>
+            <a:r>
+              <a:t>最も重要なのが「前週同時刻の負荷」です。週周期パターンが強いことを示しています。</a:t>
+            </a:r>
+          </a:p>
+          <a:p>
+            <a:r>
+              <a:t>次いで「営業日フラグ」、平日と休日で電力消費が大きく異なります。</a:t>
+            </a:r>
+          </a:p>
+          <a:p>
+            <a:r>
+              <a:t>3位は「前日同時刻の気温」、暑熱の連続性を反映しています。</a:t>
+            </a:r>
+          </a:p>
+          <a:p>
+            <a:r>
+              <a:t>4位は「日射量予報」、翌日の冷房需要を予測する重要な情報源です。</a:t>
+            </a:r>
+          </a:p>
+          <a:p>
+            <a:r>
+              <a:t>このように、モデルは現実的な物理的・運用的要因を捉えていることが分かります。</a:t>
+            </a:r>
+          </a:p>
+        </p:txBody>
+      </p:sp>
+      <p:sp>
+        <p:nvSpPr>
+          <p:cNvPr id="4" name="Slide Number Placeholder 3"/>
+          <p:cNvSpPr>
+            <a:spLocks noGrp="1"/>
+          </p:cNvSpPr>
+          <p:nvPr>
+            <p:ph type="sldNum" idx="5" sz="quarter"/>
+          </p:nvPr>
+        </p:nvSpPr>
+        <p:spPr/>
+      </p:sp>
+    </p:spTree>
+  </p:cSld>
+  <p:clrMapOvr>
+    <a:masterClrMapping/>
+  </p:clrMapOvr>
+</p:notes>
+</file>
+
+<file path=ppt/notesSlides/notesSlide12.xml><?xml version="1.0" encoding="utf-8"?>
+<p:notes xmlns:a="http://schemas.openxmlformats.org/drawingml/2006/main" xmlns:p="http://schemas.openxmlformats.org/presentationml/2006/main" xmlns:r="http://schemas.openxmlformats.org/officeDocument/2006/relationships">
+  <p:cSld>
+    <p:spTree>
+      <p:nvGrpSpPr>
+        <p:cNvPr id="1" name=""/>
+        <p:cNvGrpSpPr/>
+        <p:nvPr/>
+      </p:nvGrpSpPr>
+      <p:grpSpPr>
+        <a:xfrm>
+          <a:off x="0" y="0"/>
+          <a:ext cx="0" cy="0"/>
+          <a:chOff x="0" y="0"/>
+          <a:chExt cx="0" cy="0"/>
+        </a:xfrm>
+      </p:grpSpPr>
+      <p:sp>
+        <p:nvSpPr>
+          <p:cNvPr id="2" name="Slide Image Placeholder 1"/>
+          <p:cNvSpPr>
+            <a:spLocks noGrp="1"/>
+          </p:cNvSpPr>
+          <p:nvPr>
+            <p:ph type="sldImg" idx="2"/>
+          </p:nvPr>
+        </p:nvSpPr>
+        <p:spPr/>
+      </p:sp>
+      <p:sp>
+        <p:nvSpPr>
+          <p:cNvPr id="3" name="Notes Placeholder 2"/>
+          <p:cNvSpPr>
+            <a:spLocks noGrp="1"/>
+          </p:cNvSpPr>
+          <p:nvPr>
+            <p:ph type="body" idx="3" sz="quarter"/>
+          </p:nvPr>
+        </p:nvSpPr>
+        <p:spPr/>
+        <p:txBody>
+          <a:bodyPr/>
+          <a:lstStyle/>
+          <a:p>
+            <a:r>
               <a:t>最後にまとめです。</a:t>
             </a:r>
           </a:p>
@@ -1208,32 +1400,42 @@
           <a:lstStyle/>
           <a:p>
             <a:r>
-              <a:t>ここからは結果のご紹介です。</a:t>
-            </a:r>
-          </a:p>
-          <a:p>
-            <a:r>
-              <a:t>こちらがテスト期間の予測結果です。</a:t>
-            </a:r>
-          </a:p>
-          <a:p>
-            <a:r>
-              <a:t>青い線が実測値、オレンジの線が予測値です。</a:t>
-            </a:r>
-          </a:p>
-          <a:p>
-            <a:r>
-              <a:t>赤い点線はP80閾値、つまりSDR発令を検討するべき水準です。</a:t>
-            </a:r>
-          </a:p>
-          <a:p>
-            <a:r>
-              <a:t>全体として、予測値は実測値をよく追従しており、複数のピーク日も正しく捕捉できています。</a:t>
-            </a:r>
-          </a:p>
-          <a:p>
-            <a:r>
-              <a:t>平均誤差 (MAE) は約 54.0 kW、決定係数 R² は 0.905 と良好な精度を達成しました。</a:t>
+              <a:t>まず気象と電力の関係性を見ていきます。</a:t>
+            </a:r>
+          </a:p>
+          <a:p>
+            <a:r>
+              <a:t>左の図は、各気象変数と電力消費 b00 の相関係数です。</a:t>
+            </a:r>
+          </a:p>
+          <a:p>
+            <a:r>
+              <a:t>最も強い正相関は「日射量」、r = +0.67 です。</a:t>
+            </a:r>
+          </a:p>
+          <a:p>
+            <a:r>
+              <a:t>次が「気温」、r = +0.57。</a:t>
+            </a:r>
+          </a:p>
+          <a:p>
+            <a:r>
+              <a:t>そして「湿度」は負相関、r = −0.52 です。</a:t>
+            </a:r>
+          </a:p>
+          <a:p>
+            <a:r>
+              <a:t>右下の標準化回帰係数では、日射量と気温が主な「電力を上げる」要因、</a:t>
+            </a:r>
+          </a:p>
+          <a:p>
+            <a:r>
+              <a:t>湿度と気圧が「電力を下げる」要因として現れています。</a:t>
+            </a:r>
+          </a:p>
+          <a:p>
+            <a:r>
+              <a:t>気象変数だけで電力分散の約 53% を説明できることが分かりました。</a:t>
             </a:r>
           </a:p>
         </p:txBody>
@@ -1303,32 +1505,58 @@
           <a:lstStyle/>
           <a:p>
             <a:r>
-              <a:t>次に散布図とアーキテクチャ比較です。</a:t>
-            </a:r>
-          </a:p>
-          <a:p>
-            <a:r>
-              <a:t>左の散布図では、点が対角線 y=x に沿って分布しており、予測値と実測値がよく一致していることが分かります。</a:t>
-            </a:r>
-          </a:p>
-          <a:p>
-            <a:r>
-              <a:t>右の表は、3つの手法を比較したものです。</a:t>
-            </a:r>
-          </a:p>
-          <a:p>
-            <a:r>
-              <a:t>A は観測値のみを使う理論上限、B は予報値のみを使う従来手法、そして C が本研究のハイブリッド手法です。</a:t>
-            </a:r>
-          </a:p>
-          <a:p>
-            <a:r>
-              <a:t>Cは B より MAE が 10% 改善し、A との差はわずか 6% です。</a:t>
-            </a:r>
-          </a:p>
-          <a:p>
-            <a:r>
-              <a:t>つまり、観測値を使った理論上限に近い精度を、実運用で実現できたということです。</a:t>
+              <a:t>次に主成分分析、PCAの結果です。</a:t>
+            </a:r>
+          </a:p>
+          <a:p>
+            <a:r>
+              <a:t>気象データは 10個の変数からなりますが、互いに相関するため、独立な成分に分解しました。</a:t>
+            </a:r>
+          </a:p>
+          <a:p>
+            <a:r>
+              <a:t>左のグラフは各主成分の寄与率です。</a:t>
+            </a:r>
+          </a:p>
+          <a:p>
+            <a:r>
+              <a:t>PC1 が 41.7%、PC2 が 21.1%、PC3 が 13.1%。</a:t>
+            </a:r>
+          </a:p>
+          <a:p>
+            <a:r>
+              <a:t>つまり、3つの主成分だけで、気象変動の 76% を表現できます。</a:t>
+            </a:r>
+          </a:p>
+          <a:p/>
+          <a:p>
+            <a:r>
+              <a:t>右のヒートマップは、各主成分の構成を示しています。</a:t>
+            </a:r>
+          </a:p>
+          <a:p>
+            <a:r>
+              <a:t>PC1 は「熱関連成分」、気温・体感気温・WBGT が共に寄与します。</a:t>
+            </a:r>
+          </a:p>
+          <a:p>
+            <a:r>
+              <a:t>PC2 は「湿度と日射の対立成分」、悪天候の日に対応します。</a:t>
+            </a:r>
+          </a:p>
+          <a:p>
+            <a:r>
+              <a:t>右側のバーは、各主成分と b00 の相関を示しており、</a:t>
+            </a:r>
+          </a:p>
+          <a:p>
+            <a:r>
+              <a:t>PC1 は +0.47、PC2 は −0.50、PC3 は +0.16 となっています。</a:t>
+            </a:r>
+          </a:p>
+          <a:p>
+            <a:r>
+              <a:t>つまり、気温と湿天候という 2つの軸が電力を主に左右していることが分かります。</a:t>
             </a:r>
           </a:p>
         </p:txBody>
@@ -1398,32 +1626,32 @@
           <a:lstStyle/>
           <a:p>
             <a:r>
-              <a:t>こちらが予測の根拠となる特徴量です。SHAP値で重要度を可視化しました。</a:t>
-            </a:r>
-          </a:p>
-          <a:p>
-            <a:r>
-              <a:t>最も重要なのが「前週同時刻の負荷」です。週周期パターンが強いことを示しています。</a:t>
-            </a:r>
-          </a:p>
-          <a:p>
-            <a:r>
-              <a:t>次いで「営業日フラグ」、平日と休日で電力消費が大きく異なります。</a:t>
-            </a:r>
-          </a:p>
-          <a:p>
-            <a:r>
-              <a:t>3位は「前日同時刻の気温」、暑熱の連続性を反映しています。</a:t>
-            </a:r>
-          </a:p>
-          <a:p>
-            <a:r>
-              <a:t>4位は「日射量予報」、翌日の冷房需要を予測する重要な情報源です。</a:t>
-            </a:r>
-          </a:p>
-          <a:p>
-            <a:r>
-              <a:t>このように、モデルは現実的な物理的・運用的要因を捉えていることが分かります。</a:t>
+              <a:t>ここからは結果のご紹介です。</a:t>
+            </a:r>
+          </a:p>
+          <a:p>
+            <a:r>
+              <a:t>こちらがテスト期間の予測結果です。</a:t>
+            </a:r>
+          </a:p>
+          <a:p>
+            <a:r>
+              <a:t>青い線が実測値、オレンジの線が予測値です。</a:t>
+            </a:r>
+          </a:p>
+          <a:p>
+            <a:r>
+              <a:t>赤い点線はP80閾値、つまりSDR発令を検討するべき水準です。</a:t>
+            </a:r>
+          </a:p>
+          <a:p>
+            <a:r>
+              <a:t>全体として、予測値は実測値をよく追従しており、複数のピーク日も正しく捕捉できています。</a:t>
+            </a:r>
+          </a:p>
+          <a:p>
+            <a:r>
+              <a:t>平均誤差 (MAE) は約 54.0 kW、決定係数 R² は 0.905 と良好な精度を達成しました。</a:t>
             </a:r>
           </a:p>
         </p:txBody>
@@ -4839,7 +5067,2383 @@
                 <a:latin typeface="Yu Gothic"/>
                 <a:ea typeface="Yu Gothic"/>
               </a:rPr>
-              <a:t>Slide 10 / 10</a:t>
+              <a:t>Slide 10 / 12</a:t>
+            </a:r>
+          </a:p>
+        </p:txBody>
+      </p:sp>
+      <p:sp>
+        <p:nvSpPr>
+          <p:cNvPr id="5" name="Rectangle 4"/>
+          <p:cNvSpPr/>
+          <p:nvPr/>
+        </p:nvSpPr>
+        <p:spPr>
+          <a:xfrm>
+            <a:off x="0" y="6629400"/>
+            <a:ext cx="12191695" cy="228600"/>
+          </a:xfrm>
+          <a:prstGeom prst="rect">
+            <a:avLst/>
+          </a:prstGeom>
+          <a:solidFill>
+            <a:srgbClr val="003B71"/>
+          </a:solidFill>
+          <a:ln>
+            <a:noFill/>
+          </a:ln>
+          <a:effectLst/>
+        </p:spPr>
+        <p:style>
+          <a:lnRef idx="1">
+            <a:schemeClr val="accent1"/>
+          </a:lnRef>
+          <a:fillRef idx="3">
+            <a:schemeClr val="accent1"/>
+          </a:fillRef>
+          <a:effectRef idx="2">
+            <a:schemeClr val="accent1"/>
+          </a:effectRef>
+          <a:fontRef idx="minor">
+            <a:schemeClr val="lt1"/>
+          </a:fontRef>
+        </p:style>
+        <p:txBody>
+          <a:bodyPr rtlCol="0" anchor="ctr"/>
+          <a:lstStyle/>
+          <a:p>
+            <a:pPr algn="ctr"/>
+          </a:p>
+        </p:txBody>
+      </p:sp>
+      <p:sp>
+        <p:nvSpPr>
+          <p:cNvPr id="6" name="TextBox 5"/>
+          <p:cNvSpPr txBox="1"/>
+          <p:nvPr/>
+        </p:nvSpPr>
+        <p:spPr>
+          <a:xfrm>
+            <a:off x="274320" y="6656832"/>
+            <a:ext cx="9144000" cy="182880"/>
+          </a:xfrm>
+          <a:prstGeom prst="rect">
+            <a:avLst/>
+          </a:prstGeom>
+          <a:noFill/>
+        </p:spPr>
+        <p:txBody>
+          <a:bodyPr wrap="square" anchor="ctr" lIns="0" rIns="0" tIns="0" bIns="0">
+            <a:spAutoFit/>
+          </a:bodyPr>
+          <a:lstStyle/>
+          <a:p>
+            <a:pPr algn="l"/>
+            <a:r>
+              <a:rPr sz="850" b="0">
+                <a:solidFill>
+                  <a:srgbClr val="FFFFFF"/>
+                </a:solidFill>
+                <a:latin typeface="Yu Gothic"/>
+                <a:ea typeface="Yu Gothic"/>
+              </a:rPr>
+              <a:t>山口大学 (Yamaguchi University) — 省エネ研究会 2026</a:t>
+            </a:r>
+          </a:p>
+        </p:txBody>
+      </p:sp>
+      <p:sp>
+        <p:nvSpPr>
+          <p:cNvPr id="7" name="TextBox 6"/>
+          <p:cNvSpPr txBox="1"/>
+          <p:nvPr/>
+        </p:nvSpPr>
+        <p:spPr>
+          <a:xfrm>
+            <a:off x="365760" y="457200"/>
+            <a:ext cx="11430000" cy="548640"/>
+          </a:xfrm>
+          <a:prstGeom prst="rect">
+            <a:avLst/>
+          </a:prstGeom>
+          <a:noFill/>
+        </p:spPr>
+        <p:txBody>
+          <a:bodyPr wrap="square" anchor="t" lIns="0" rIns="0" tIns="0" bIns="0">
+            <a:spAutoFit/>
+          </a:bodyPr>
+          <a:lstStyle/>
+          <a:p>
+            <a:pPr algn="l"/>
+            <a:r>
+              <a:rPr sz="2600" b="1">
+                <a:solidFill>
+                  <a:srgbClr val="003B71"/>
+                </a:solidFill>
+                <a:latin typeface="Yu Gothic"/>
+                <a:ea typeface="Yu Gothic"/>
+              </a:rPr>
+              <a:t>結果② 予測 vs 実測の対応</a:t>
+            </a:r>
+          </a:p>
+        </p:txBody>
+      </p:sp>
+      <p:sp>
+        <p:nvSpPr>
+          <p:cNvPr id="8" name="Rectangle 7"/>
+          <p:cNvSpPr/>
+          <p:nvPr/>
+        </p:nvSpPr>
+        <p:spPr>
+          <a:xfrm>
+            <a:off x="365760" y="1024128"/>
+            <a:ext cx="1097280" cy="54864"/>
+          </a:xfrm>
+          <a:prstGeom prst="rect">
+            <a:avLst/>
+          </a:prstGeom>
+          <a:solidFill>
+            <a:srgbClr val="E78A00"/>
+          </a:solidFill>
+          <a:ln>
+            <a:noFill/>
+          </a:ln>
+          <a:effectLst/>
+        </p:spPr>
+        <p:style>
+          <a:lnRef idx="1">
+            <a:schemeClr val="accent1"/>
+          </a:lnRef>
+          <a:fillRef idx="3">
+            <a:schemeClr val="accent1"/>
+          </a:fillRef>
+          <a:effectRef idx="2">
+            <a:schemeClr val="accent1"/>
+          </a:effectRef>
+          <a:fontRef idx="minor">
+            <a:schemeClr val="lt1"/>
+          </a:fontRef>
+        </p:style>
+        <p:txBody>
+          <a:bodyPr rtlCol="0" anchor="ctr"/>
+          <a:lstStyle/>
+          <a:p>
+            <a:pPr algn="ctr"/>
+          </a:p>
+        </p:txBody>
+      </p:sp>
+      <p:sp>
+        <p:nvSpPr>
+          <p:cNvPr id="9" name="TextBox 8"/>
+          <p:cNvSpPr txBox="1"/>
+          <p:nvPr/>
+        </p:nvSpPr>
+        <p:spPr>
+          <a:xfrm>
+            <a:off x="365760" y="1097280"/>
+            <a:ext cx="11430000" cy="365760"/>
+          </a:xfrm>
+          <a:prstGeom prst="rect">
+            <a:avLst/>
+          </a:prstGeom>
+          <a:noFill/>
+        </p:spPr>
+        <p:txBody>
+          <a:bodyPr wrap="square" anchor="t" lIns="0" rIns="0" tIns="0" bIns="0">
+            <a:spAutoFit/>
+          </a:bodyPr>
+          <a:lstStyle/>
+          <a:p>
+            <a:pPr algn="l"/>
+            <a:r>
+              <a:rPr sz="1400" b="0">
+                <a:solidFill>
+                  <a:srgbClr val="5A5A5A"/>
+                </a:solidFill>
+                <a:latin typeface="Yu Gothic"/>
+                <a:ea typeface="Yu Gothic"/>
+              </a:rPr>
+              <a:t>散布図で見る予測精度  —  MAE 54.0 kW, MAPE 7.28%</a:t>
+            </a:r>
+          </a:p>
+        </p:txBody>
+      </p:sp>
+      <p:pic>
+        <p:nvPicPr>
+          <p:cNvPr id="10" name="Picture 9" descr="pres_05_pred_vs_actual.png"/>
+          <p:cNvPicPr>
+            <a:picLocks noChangeAspect="1"/>
+          </p:cNvPicPr>
+          <p:nvPr/>
+        </p:nvPicPr>
+        <p:blipFill>
+          <a:blip r:embed="rId2"/>
+          <a:stretch>
+            <a:fillRect/>
+          </a:stretch>
+        </p:blipFill>
+        <p:spPr>
+          <a:xfrm>
+            <a:off x="365760" y="1828800"/>
+            <a:ext cx="5943600" cy="5448300"/>
+          </a:xfrm>
+          <a:prstGeom prst="rect">
+            <a:avLst/>
+          </a:prstGeom>
+        </p:spPr>
+      </p:pic>
+      <p:sp>
+        <p:nvSpPr>
+          <p:cNvPr id="11" name="TextBox 10"/>
+          <p:cNvSpPr txBox="1"/>
+          <p:nvPr/>
+        </p:nvSpPr>
+        <p:spPr>
+          <a:xfrm>
+            <a:off x="6858000" y="1828800"/>
+            <a:ext cx="5029200" cy="365760"/>
+          </a:xfrm>
+          <a:prstGeom prst="rect">
+            <a:avLst/>
+          </a:prstGeom>
+          <a:noFill/>
+        </p:spPr>
+        <p:txBody>
+          <a:bodyPr wrap="square" anchor="t" lIns="0" rIns="0" tIns="0" bIns="0">
+            <a:spAutoFit/>
+          </a:bodyPr>
+          <a:lstStyle/>
+          <a:p>
+            <a:pPr algn="l"/>
+            <a:r>
+              <a:rPr sz="1500" b="1">
+                <a:solidFill>
+                  <a:srgbClr val="003B71"/>
+                </a:solidFill>
+                <a:latin typeface="Yu Gothic"/>
+                <a:ea typeface="Yu Gothic"/>
+              </a:rPr>
+              <a:t>■ 3アーキテクチャの精度比較</a:t>
+            </a:r>
+          </a:p>
+        </p:txBody>
+      </p:sp>
+      <p:sp>
+        <p:nvSpPr>
+          <p:cNvPr id="12" name="Rectangle 11"/>
+          <p:cNvSpPr/>
+          <p:nvPr/>
+        </p:nvSpPr>
+        <p:spPr>
+          <a:xfrm>
+            <a:off x="6858000" y="2286000"/>
+            <a:ext cx="2011680" cy="411480"/>
+          </a:xfrm>
+          <a:prstGeom prst="rect">
+            <a:avLst/>
+          </a:prstGeom>
+          <a:solidFill>
+            <a:srgbClr val="003B71"/>
+          </a:solidFill>
+          <a:ln>
+            <a:noFill/>
+          </a:ln>
+          <a:effectLst/>
+        </p:spPr>
+        <p:style>
+          <a:lnRef idx="1">
+            <a:schemeClr val="accent1"/>
+          </a:lnRef>
+          <a:fillRef idx="3">
+            <a:schemeClr val="accent1"/>
+          </a:fillRef>
+          <a:effectRef idx="2">
+            <a:schemeClr val="accent1"/>
+          </a:effectRef>
+          <a:fontRef idx="minor">
+            <a:schemeClr val="lt1"/>
+          </a:fontRef>
+        </p:style>
+        <p:txBody>
+          <a:bodyPr rtlCol="0" anchor="ctr"/>
+          <a:lstStyle/>
+          <a:p>
+            <a:pPr algn="ctr"/>
+          </a:p>
+        </p:txBody>
+      </p:sp>
+      <p:sp>
+        <p:nvSpPr>
+          <p:cNvPr id="13" name="TextBox 12"/>
+          <p:cNvSpPr txBox="1"/>
+          <p:nvPr/>
+        </p:nvSpPr>
+        <p:spPr>
+          <a:xfrm>
+            <a:off x="6903720" y="2322576"/>
+            <a:ext cx="1920240" cy="338328"/>
+          </a:xfrm>
+          <a:prstGeom prst="rect">
+            <a:avLst/>
+          </a:prstGeom>
+          <a:noFill/>
+        </p:spPr>
+        <p:txBody>
+          <a:bodyPr wrap="square" anchor="ctr" lIns="0" rIns="0" tIns="0" bIns="0">
+            <a:spAutoFit/>
+          </a:bodyPr>
+          <a:lstStyle/>
+          <a:p>
+            <a:pPr algn="l"/>
+            <a:r>
+              <a:rPr sz="1200" b="1">
+                <a:solidFill>
+                  <a:srgbClr val="FFFFFF"/>
+                </a:solidFill>
+                <a:latin typeface="Yu Gothic"/>
+                <a:ea typeface="Yu Gothic"/>
+              </a:rPr>
+              <a:t>手法</a:t>
+            </a:r>
+          </a:p>
+        </p:txBody>
+      </p:sp>
+      <p:sp>
+        <p:nvSpPr>
+          <p:cNvPr id="14" name="Rectangle 13"/>
+          <p:cNvSpPr/>
+          <p:nvPr/>
+        </p:nvSpPr>
+        <p:spPr>
+          <a:xfrm>
+            <a:off x="8869680" y="2286000"/>
+            <a:ext cx="1005840" cy="411480"/>
+          </a:xfrm>
+          <a:prstGeom prst="rect">
+            <a:avLst/>
+          </a:prstGeom>
+          <a:solidFill>
+            <a:srgbClr val="003B71"/>
+          </a:solidFill>
+          <a:ln>
+            <a:noFill/>
+          </a:ln>
+          <a:effectLst/>
+        </p:spPr>
+        <p:style>
+          <a:lnRef idx="1">
+            <a:schemeClr val="accent1"/>
+          </a:lnRef>
+          <a:fillRef idx="3">
+            <a:schemeClr val="accent1"/>
+          </a:fillRef>
+          <a:effectRef idx="2">
+            <a:schemeClr val="accent1"/>
+          </a:effectRef>
+          <a:fontRef idx="minor">
+            <a:schemeClr val="lt1"/>
+          </a:fontRef>
+        </p:style>
+        <p:txBody>
+          <a:bodyPr rtlCol="0" anchor="ctr"/>
+          <a:lstStyle/>
+          <a:p>
+            <a:pPr algn="ctr"/>
+          </a:p>
+        </p:txBody>
+      </p:sp>
+      <p:sp>
+        <p:nvSpPr>
+          <p:cNvPr id="15" name="TextBox 14"/>
+          <p:cNvSpPr txBox="1"/>
+          <p:nvPr/>
+        </p:nvSpPr>
+        <p:spPr>
+          <a:xfrm>
+            <a:off x="8915400" y="2322576"/>
+            <a:ext cx="914400" cy="338328"/>
+          </a:xfrm>
+          <a:prstGeom prst="rect">
+            <a:avLst/>
+          </a:prstGeom>
+          <a:noFill/>
+        </p:spPr>
+        <p:txBody>
+          <a:bodyPr wrap="square" anchor="ctr" lIns="0" rIns="0" tIns="0" bIns="0">
+            <a:spAutoFit/>
+          </a:bodyPr>
+          <a:lstStyle/>
+          <a:p>
+            <a:pPr algn="l"/>
+            <a:r>
+              <a:rPr sz="1200" b="1">
+                <a:solidFill>
+                  <a:srgbClr val="FFFFFF"/>
+                </a:solidFill>
+                <a:latin typeface="Yu Gothic"/>
+                <a:ea typeface="Yu Gothic"/>
+              </a:rPr>
+              <a:t>MAE(kW)</a:t>
+            </a:r>
+          </a:p>
+        </p:txBody>
+      </p:sp>
+      <p:sp>
+        <p:nvSpPr>
+          <p:cNvPr id="16" name="Rectangle 15"/>
+          <p:cNvSpPr/>
+          <p:nvPr/>
+        </p:nvSpPr>
+        <p:spPr>
+          <a:xfrm>
+            <a:off x="9875520" y="2286000"/>
+            <a:ext cx="914400" cy="411480"/>
+          </a:xfrm>
+          <a:prstGeom prst="rect">
+            <a:avLst/>
+          </a:prstGeom>
+          <a:solidFill>
+            <a:srgbClr val="003B71"/>
+          </a:solidFill>
+          <a:ln>
+            <a:noFill/>
+          </a:ln>
+          <a:effectLst/>
+        </p:spPr>
+        <p:style>
+          <a:lnRef idx="1">
+            <a:schemeClr val="accent1"/>
+          </a:lnRef>
+          <a:fillRef idx="3">
+            <a:schemeClr val="accent1"/>
+          </a:fillRef>
+          <a:effectRef idx="2">
+            <a:schemeClr val="accent1"/>
+          </a:effectRef>
+          <a:fontRef idx="minor">
+            <a:schemeClr val="lt1"/>
+          </a:fontRef>
+        </p:style>
+        <p:txBody>
+          <a:bodyPr rtlCol="0" anchor="ctr"/>
+          <a:lstStyle/>
+          <a:p>
+            <a:pPr algn="ctr"/>
+          </a:p>
+        </p:txBody>
+      </p:sp>
+      <p:sp>
+        <p:nvSpPr>
+          <p:cNvPr id="17" name="TextBox 16"/>
+          <p:cNvSpPr txBox="1"/>
+          <p:nvPr/>
+        </p:nvSpPr>
+        <p:spPr>
+          <a:xfrm>
+            <a:off x="9921240" y="2322576"/>
+            <a:ext cx="822960" cy="338328"/>
+          </a:xfrm>
+          <a:prstGeom prst="rect">
+            <a:avLst/>
+          </a:prstGeom>
+          <a:noFill/>
+        </p:spPr>
+        <p:txBody>
+          <a:bodyPr wrap="square" anchor="ctr" lIns="0" rIns="0" tIns="0" bIns="0">
+            <a:spAutoFit/>
+          </a:bodyPr>
+          <a:lstStyle/>
+          <a:p>
+            <a:pPr algn="l"/>
+            <a:r>
+              <a:rPr sz="1200" b="1">
+                <a:solidFill>
+                  <a:srgbClr val="FFFFFF"/>
+                </a:solidFill>
+                <a:latin typeface="Yu Gothic"/>
+                <a:ea typeface="Yu Gothic"/>
+              </a:rPr>
+              <a:t>R²</a:t>
+            </a:r>
+          </a:p>
+        </p:txBody>
+      </p:sp>
+      <p:sp>
+        <p:nvSpPr>
+          <p:cNvPr id="18" name="Rectangle 17"/>
+          <p:cNvSpPr/>
+          <p:nvPr/>
+        </p:nvSpPr>
+        <p:spPr>
+          <a:xfrm>
+            <a:off x="10789920" y="2286000"/>
+            <a:ext cx="914400" cy="411480"/>
+          </a:xfrm>
+          <a:prstGeom prst="rect">
+            <a:avLst/>
+          </a:prstGeom>
+          <a:solidFill>
+            <a:srgbClr val="003B71"/>
+          </a:solidFill>
+          <a:ln>
+            <a:noFill/>
+          </a:ln>
+          <a:effectLst/>
+        </p:spPr>
+        <p:style>
+          <a:lnRef idx="1">
+            <a:schemeClr val="accent1"/>
+          </a:lnRef>
+          <a:fillRef idx="3">
+            <a:schemeClr val="accent1"/>
+          </a:fillRef>
+          <a:effectRef idx="2">
+            <a:schemeClr val="accent1"/>
+          </a:effectRef>
+          <a:fontRef idx="minor">
+            <a:schemeClr val="lt1"/>
+          </a:fontRef>
+        </p:style>
+        <p:txBody>
+          <a:bodyPr rtlCol="0" anchor="ctr"/>
+          <a:lstStyle/>
+          <a:p>
+            <a:pPr algn="ctr"/>
+          </a:p>
+        </p:txBody>
+      </p:sp>
+      <p:sp>
+        <p:nvSpPr>
+          <p:cNvPr id="19" name="TextBox 18"/>
+          <p:cNvSpPr txBox="1"/>
+          <p:nvPr/>
+        </p:nvSpPr>
+        <p:spPr>
+          <a:xfrm>
+            <a:off x="10835640" y="2322576"/>
+            <a:ext cx="822960" cy="338328"/>
+          </a:xfrm>
+          <a:prstGeom prst="rect">
+            <a:avLst/>
+          </a:prstGeom>
+          <a:noFill/>
+        </p:spPr>
+        <p:txBody>
+          <a:bodyPr wrap="square" anchor="ctr" lIns="0" rIns="0" tIns="0" bIns="0">
+            <a:spAutoFit/>
+          </a:bodyPr>
+          <a:lstStyle/>
+          <a:p>
+            <a:pPr algn="l"/>
+            <a:r>
+              <a:rPr sz="1200" b="1">
+                <a:solidFill>
+                  <a:srgbClr val="FFFFFF"/>
+                </a:solidFill>
+                <a:latin typeface="Yu Gothic"/>
+                <a:ea typeface="Yu Gothic"/>
+              </a:rPr>
+              <a:t>MAPE(%)</a:t>
+            </a:r>
+          </a:p>
+        </p:txBody>
+      </p:sp>
+      <p:sp>
+        <p:nvSpPr>
+          <p:cNvPr id="20" name="Rectangle 19"/>
+          <p:cNvSpPr/>
+          <p:nvPr/>
+        </p:nvSpPr>
+        <p:spPr>
+          <a:xfrm>
+            <a:off x="6858000" y="2697480"/>
+            <a:ext cx="2011680" cy="411480"/>
+          </a:xfrm>
+          <a:prstGeom prst="rect">
+            <a:avLst/>
+          </a:prstGeom>
+          <a:solidFill>
+            <a:srgbClr val="F4F6FA"/>
+          </a:solidFill>
+          <a:ln>
+            <a:noFill/>
+          </a:ln>
+          <a:effectLst/>
+        </p:spPr>
+        <p:style>
+          <a:lnRef idx="1">
+            <a:schemeClr val="accent1"/>
+          </a:lnRef>
+          <a:fillRef idx="3">
+            <a:schemeClr val="accent1"/>
+          </a:fillRef>
+          <a:effectRef idx="2">
+            <a:schemeClr val="accent1"/>
+          </a:effectRef>
+          <a:fontRef idx="minor">
+            <a:schemeClr val="lt1"/>
+          </a:fontRef>
+        </p:style>
+        <p:txBody>
+          <a:bodyPr rtlCol="0" anchor="ctr"/>
+          <a:lstStyle/>
+          <a:p>
+            <a:pPr algn="ctr"/>
+          </a:p>
+        </p:txBody>
+      </p:sp>
+      <p:sp>
+        <p:nvSpPr>
+          <p:cNvPr id="21" name="TextBox 20"/>
+          <p:cNvSpPr txBox="1"/>
+          <p:nvPr/>
+        </p:nvSpPr>
+        <p:spPr>
+          <a:xfrm>
+            <a:off x="6903720" y="2734056"/>
+            <a:ext cx="1920240" cy="338328"/>
+          </a:xfrm>
+          <a:prstGeom prst="rect">
+            <a:avLst/>
+          </a:prstGeom>
+          <a:noFill/>
+        </p:spPr>
+        <p:txBody>
+          <a:bodyPr wrap="square" anchor="ctr" lIns="0" rIns="0" tIns="0" bIns="0">
+            <a:spAutoFit/>
+          </a:bodyPr>
+          <a:lstStyle/>
+          <a:p>
+            <a:pPr algn="l"/>
+            <a:r>
+              <a:rPr sz="1200" b="0">
+                <a:solidFill>
+                  <a:srgbClr val="5A5A5A"/>
+                </a:solidFill>
+                <a:latin typeface="Yu Gothic"/>
+                <a:ea typeface="Yu Gothic"/>
+              </a:rPr>
+              <a:t>A: 観測のみ (上限)</a:t>
+            </a:r>
+          </a:p>
+        </p:txBody>
+      </p:sp>
+      <p:sp>
+        <p:nvSpPr>
+          <p:cNvPr id="22" name="Rectangle 21"/>
+          <p:cNvSpPr/>
+          <p:nvPr/>
+        </p:nvSpPr>
+        <p:spPr>
+          <a:xfrm>
+            <a:off x="8869680" y="2697480"/>
+            <a:ext cx="1005840" cy="411480"/>
+          </a:xfrm>
+          <a:prstGeom prst="rect">
+            <a:avLst/>
+          </a:prstGeom>
+          <a:solidFill>
+            <a:srgbClr val="F4F6FA"/>
+          </a:solidFill>
+          <a:ln>
+            <a:noFill/>
+          </a:ln>
+          <a:effectLst/>
+        </p:spPr>
+        <p:style>
+          <a:lnRef idx="1">
+            <a:schemeClr val="accent1"/>
+          </a:lnRef>
+          <a:fillRef idx="3">
+            <a:schemeClr val="accent1"/>
+          </a:fillRef>
+          <a:effectRef idx="2">
+            <a:schemeClr val="accent1"/>
+          </a:effectRef>
+          <a:fontRef idx="minor">
+            <a:schemeClr val="lt1"/>
+          </a:fontRef>
+        </p:style>
+        <p:txBody>
+          <a:bodyPr rtlCol="0" anchor="ctr"/>
+          <a:lstStyle/>
+          <a:p>
+            <a:pPr algn="ctr"/>
+          </a:p>
+        </p:txBody>
+      </p:sp>
+      <p:sp>
+        <p:nvSpPr>
+          <p:cNvPr id="23" name="TextBox 22"/>
+          <p:cNvSpPr txBox="1"/>
+          <p:nvPr/>
+        </p:nvSpPr>
+        <p:spPr>
+          <a:xfrm>
+            <a:off x="8915400" y="2734056"/>
+            <a:ext cx="914400" cy="338328"/>
+          </a:xfrm>
+          <a:prstGeom prst="rect">
+            <a:avLst/>
+          </a:prstGeom>
+          <a:noFill/>
+        </p:spPr>
+        <p:txBody>
+          <a:bodyPr wrap="square" anchor="ctr" lIns="0" rIns="0" tIns="0" bIns="0">
+            <a:spAutoFit/>
+          </a:bodyPr>
+          <a:lstStyle/>
+          <a:p>
+            <a:pPr algn="l"/>
+            <a:r>
+              <a:rPr sz="1200" b="0">
+                <a:solidFill>
+                  <a:srgbClr val="5A5A5A"/>
+                </a:solidFill>
+                <a:latin typeface="Yu Gothic"/>
+                <a:ea typeface="Yu Gothic"/>
+              </a:rPr>
+              <a:t>50.7</a:t>
+            </a:r>
+          </a:p>
+        </p:txBody>
+      </p:sp>
+      <p:sp>
+        <p:nvSpPr>
+          <p:cNvPr id="24" name="Rectangle 23"/>
+          <p:cNvSpPr/>
+          <p:nvPr/>
+        </p:nvSpPr>
+        <p:spPr>
+          <a:xfrm>
+            <a:off x="9875520" y="2697480"/>
+            <a:ext cx="914400" cy="411480"/>
+          </a:xfrm>
+          <a:prstGeom prst="rect">
+            <a:avLst/>
+          </a:prstGeom>
+          <a:solidFill>
+            <a:srgbClr val="F4F6FA"/>
+          </a:solidFill>
+          <a:ln>
+            <a:noFill/>
+          </a:ln>
+          <a:effectLst/>
+        </p:spPr>
+        <p:style>
+          <a:lnRef idx="1">
+            <a:schemeClr val="accent1"/>
+          </a:lnRef>
+          <a:fillRef idx="3">
+            <a:schemeClr val="accent1"/>
+          </a:fillRef>
+          <a:effectRef idx="2">
+            <a:schemeClr val="accent1"/>
+          </a:effectRef>
+          <a:fontRef idx="minor">
+            <a:schemeClr val="lt1"/>
+          </a:fontRef>
+        </p:style>
+        <p:txBody>
+          <a:bodyPr rtlCol="0" anchor="ctr"/>
+          <a:lstStyle/>
+          <a:p>
+            <a:pPr algn="ctr"/>
+          </a:p>
+        </p:txBody>
+      </p:sp>
+      <p:sp>
+        <p:nvSpPr>
+          <p:cNvPr id="25" name="TextBox 24"/>
+          <p:cNvSpPr txBox="1"/>
+          <p:nvPr/>
+        </p:nvSpPr>
+        <p:spPr>
+          <a:xfrm>
+            <a:off x="9921240" y="2734056"/>
+            <a:ext cx="822960" cy="338328"/>
+          </a:xfrm>
+          <a:prstGeom prst="rect">
+            <a:avLst/>
+          </a:prstGeom>
+          <a:noFill/>
+        </p:spPr>
+        <p:txBody>
+          <a:bodyPr wrap="square" anchor="ctr" lIns="0" rIns="0" tIns="0" bIns="0">
+            <a:spAutoFit/>
+          </a:bodyPr>
+          <a:lstStyle/>
+          <a:p>
+            <a:pPr algn="l"/>
+            <a:r>
+              <a:rPr sz="1200" b="0">
+                <a:solidFill>
+                  <a:srgbClr val="5A5A5A"/>
+                </a:solidFill>
+                <a:latin typeface="Yu Gothic"/>
+                <a:ea typeface="Yu Gothic"/>
+              </a:rPr>
+              <a:t>0.915</a:t>
+            </a:r>
+          </a:p>
+        </p:txBody>
+      </p:sp>
+      <p:sp>
+        <p:nvSpPr>
+          <p:cNvPr id="26" name="Rectangle 25"/>
+          <p:cNvSpPr/>
+          <p:nvPr/>
+        </p:nvSpPr>
+        <p:spPr>
+          <a:xfrm>
+            <a:off x="10789920" y="2697480"/>
+            <a:ext cx="914400" cy="411480"/>
+          </a:xfrm>
+          <a:prstGeom prst="rect">
+            <a:avLst/>
+          </a:prstGeom>
+          <a:solidFill>
+            <a:srgbClr val="F4F6FA"/>
+          </a:solidFill>
+          <a:ln>
+            <a:noFill/>
+          </a:ln>
+          <a:effectLst/>
+        </p:spPr>
+        <p:style>
+          <a:lnRef idx="1">
+            <a:schemeClr val="accent1"/>
+          </a:lnRef>
+          <a:fillRef idx="3">
+            <a:schemeClr val="accent1"/>
+          </a:fillRef>
+          <a:effectRef idx="2">
+            <a:schemeClr val="accent1"/>
+          </a:effectRef>
+          <a:fontRef idx="minor">
+            <a:schemeClr val="lt1"/>
+          </a:fontRef>
+        </p:style>
+        <p:txBody>
+          <a:bodyPr rtlCol="0" anchor="ctr"/>
+          <a:lstStyle/>
+          <a:p>
+            <a:pPr algn="ctr"/>
+          </a:p>
+        </p:txBody>
+      </p:sp>
+      <p:sp>
+        <p:nvSpPr>
+          <p:cNvPr id="27" name="TextBox 26"/>
+          <p:cNvSpPr txBox="1"/>
+          <p:nvPr/>
+        </p:nvSpPr>
+        <p:spPr>
+          <a:xfrm>
+            <a:off x="10835640" y="2734056"/>
+            <a:ext cx="822960" cy="338328"/>
+          </a:xfrm>
+          <a:prstGeom prst="rect">
+            <a:avLst/>
+          </a:prstGeom>
+          <a:noFill/>
+        </p:spPr>
+        <p:txBody>
+          <a:bodyPr wrap="square" anchor="ctr" lIns="0" rIns="0" tIns="0" bIns="0">
+            <a:spAutoFit/>
+          </a:bodyPr>
+          <a:lstStyle/>
+          <a:p>
+            <a:pPr algn="l"/>
+            <a:r>
+              <a:rPr sz="1200" b="0">
+                <a:solidFill>
+                  <a:srgbClr val="5A5A5A"/>
+                </a:solidFill>
+                <a:latin typeface="Yu Gothic"/>
+                <a:ea typeface="Yu Gothic"/>
+              </a:rPr>
+              <a:t>6.96</a:t>
+            </a:r>
+          </a:p>
+        </p:txBody>
+      </p:sp>
+      <p:sp>
+        <p:nvSpPr>
+          <p:cNvPr id="28" name="Rectangle 27"/>
+          <p:cNvSpPr/>
+          <p:nvPr/>
+        </p:nvSpPr>
+        <p:spPr>
+          <a:xfrm>
+            <a:off x="6858000" y="3108960"/>
+            <a:ext cx="2011680" cy="411480"/>
+          </a:xfrm>
+          <a:prstGeom prst="rect">
+            <a:avLst/>
+          </a:prstGeom>
+          <a:solidFill>
+            <a:srgbClr val="FFFFFF"/>
+          </a:solidFill>
+          <a:ln>
+            <a:noFill/>
+          </a:ln>
+          <a:effectLst/>
+        </p:spPr>
+        <p:style>
+          <a:lnRef idx="1">
+            <a:schemeClr val="accent1"/>
+          </a:lnRef>
+          <a:fillRef idx="3">
+            <a:schemeClr val="accent1"/>
+          </a:fillRef>
+          <a:effectRef idx="2">
+            <a:schemeClr val="accent1"/>
+          </a:effectRef>
+          <a:fontRef idx="minor">
+            <a:schemeClr val="lt1"/>
+          </a:fontRef>
+        </p:style>
+        <p:txBody>
+          <a:bodyPr rtlCol="0" anchor="ctr"/>
+          <a:lstStyle/>
+          <a:p>
+            <a:pPr algn="ctr"/>
+          </a:p>
+        </p:txBody>
+      </p:sp>
+      <p:sp>
+        <p:nvSpPr>
+          <p:cNvPr id="29" name="TextBox 28"/>
+          <p:cNvSpPr txBox="1"/>
+          <p:nvPr/>
+        </p:nvSpPr>
+        <p:spPr>
+          <a:xfrm>
+            <a:off x="6903720" y="3145536"/>
+            <a:ext cx="1920240" cy="338328"/>
+          </a:xfrm>
+          <a:prstGeom prst="rect">
+            <a:avLst/>
+          </a:prstGeom>
+          <a:noFill/>
+        </p:spPr>
+        <p:txBody>
+          <a:bodyPr wrap="square" anchor="ctr" lIns="0" rIns="0" tIns="0" bIns="0">
+            <a:spAutoFit/>
+          </a:bodyPr>
+          <a:lstStyle/>
+          <a:p>
+            <a:pPr algn="l"/>
+            <a:r>
+              <a:rPr sz="1200" b="0">
+                <a:solidFill>
+                  <a:srgbClr val="5A5A5A"/>
+                </a:solidFill>
+                <a:latin typeface="Yu Gothic"/>
+                <a:ea typeface="Yu Gothic"/>
+              </a:rPr>
+              <a:t>B: 予報のみ</a:t>
+            </a:r>
+          </a:p>
+        </p:txBody>
+      </p:sp>
+      <p:sp>
+        <p:nvSpPr>
+          <p:cNvPr id="30" name="Rectangle 29"/>
+          <p:cNvSpPr/>
+          <p:nvPr/>
+        </p:nvSpPr>
+        <p:spPr>
+          <a:xfrm>
+            <a:off x="8869680" y="3108960"/>
+            <a:ext cx="1005840" cy="411480"/>
+          </a:xfrm>
+          <a:prstGeom prst="rect">
+            <a:avLst/>
+          </a:prstGeom>
+          <a:solidFill>
+            <a:srgbClr val="FFFFFF"/>
+          </a:solidFill>
+          <a:ln>
+            <a:noFill/>
+          </a:ln>
+          <a:effectLst/>
+        </p:spPr>
+        <p:style>
+          <a:lnRef idx="1">
+            <a:schemeClr val="accent1"/>
+          </a:lnRef>
+          <a:fillRef idx="3">
+            <a:schemeClr val="accent1"/>
+          </a:fillRef>
+          <a:effectRef idx="2">
+            <a:schemeClr val="accent1"/>
+          </a:effectRef>
+          <a:fontRef idx="minor">
+            <a:schemeClr val="lt1"/>
+          </a:fontRef>
+        </p:style>
+        <p:txBody>
+          <a:bodyPr rtlCol="0" anchor="ctr"/>
+          <a:lstStyle/>
+          <a:p>
+            <a:pPr algn="ctr"/>
+          </a:p>
+        </p:txBody>
+      </p:sp>
+      <p:sp>
+        <p:nvSpPr>
+          <p:cNvPr id="31" name="TextBox 30"/>
+          <p:cNvSpPr txBox="1"/>
+          <p:nvPr/>
+        </p:nvSpPr>
+        <p:spPr>
+          <a:xfrm>
+            <a:off x="8915400" y="3145536"/>
+            <a:ext cx="914400" cy="338328"/>
+          </a:xfrm>
+          <a:prstGeom prst="rect">
+            <a:avLst/>
+          </a:prstGeom>
+          <a:noFill/>
+        </p:spPr>
+        <p:txBody>
+          <a:bodyPr wrap="square" anchor="ctr" lIns="0" rIns="0" tIns="0" bIns="0">
+            <a:spAutoFit/>
+          </a:bodyPr>
+          <a:lstStyle/>
+          <a:p>
+            <a:pPr algn="l"/>
+            <a:r>
+              <a:rPr sz="1200" b="0">
+                <a:solidFill>
+                  <a:srgbClr val="5A5A5A"/>
+                </a:solidFill>
+                <a:latin typeface="Yu Gothic"/>
+                <a:ea typeface="Yu Gothic"/>
+              </a:rPr>
+              <a:t>59.7</a:t>
+            </a:r>
+          </a:p>
+        </p:txBody>
+      </p:sp>
+      <p:sp>
+        <p:nvSpPr>
+          <p:cNvPr id="32" name="Rectangle 31"/>
+          <p:cNvSpPr/>
+          <p:nvPr/>
+        </p:nvSpPr>
+        <p:spPr>
+          <a:xfrm>
+            <a:off x="9875520" y="3108960"/>
+            <a:ext cx="914400" cy="411480"/>
+          </a:xfrm>
+          <a:prstGeom prst="rect">
+            <a:avLst/>
+          </a:prstGeom>
+          <a:solidFill>
+            <a:srgbClr val="FFFFFF"/>
+          </a:solidFill>
+          <a:ln>
+            <a:noFill/>
+          </a:ln>
+          <a:effectLst/>
+        </p:spPr>
+        <p:style>
+          <a:lnRef idx="1">
+            <a:schemeClr val="accent1"/>
+          </a:lnRef>
+          <a:fillRef idx="3">
+            <a:schemeClr val="accent1"/>
+          </a:fillRef>
+          <a:effectRef idx="2">
+            <a:schemeClr val="accent1"/>
+          </a:effectRef>
+          <a:fontRef idx="minor">
+            <a:schemeClr val="lt1"/>
+          </a:fontRef>
+        </p:style>
+        <p:txBody>
+          <a:bodyPr rtlCol="0" anchor="ctr"/>
+          <a:lstStyle/>
+          <a:p>
+            <a:pPr algn="ctr"/>
+          </a:p>
+        </p:txBody>
+      </p:sp>
+      <p:sp>
+        <p:nvSpPr>
+          <p:cNvPr id="33" name="TextBox 32"/>
+          <p:cNvSpPr txBox="1"/>
+          <p:nvPr/>
+        </p:nvSpPr>
+        <p:spPr>
+          <a:xfrm>
+            <a:off x="9921240" y="3145536"/>
+            <a:ext cx="822960" cy="338328"/>
+          </a:xfrm>
+          <a:prstGeom prst="rect">
+            <a:avLst/>
+          </a:prstGeom>
+          <a:noFill/>
+        </p:spPr>
+        <p:txBody>
+          <a:bodyPr wrap="square" anchor="ctr" lIns="0" rIns="0" tIns="0" bIns="0">
+            <a:spAutoFit/>
+          </a:bodyPr>
+          <a:lstStyle/>
+          <a:p>
+            <a:pPr algn="l"/>
+            <a:r>
+              <a:rPr sz="1200" b="0">
+                <a:solidFill>
+                  <a:srgbClr val="5A5A5A"/>
+                </a:solidFill>
+                <a:latin typeface="Yu Gothic"/>
+                <a:ea typeface="Yu Gothic"/>
+              </a:rPr>
+              <a:t>0.883</a:t>
+            </a:r>
+          </a:p>
+        </p:txBody>
+      </p:sp>
+      <p:sp>
+        <p:nvSpPr>
+          <p:cNvPr id="34" name="Rectangle 33"/>
+          <p:cNvSpPr/>
+          <p:nvPr/>
+        </p:nvSpPr>
+        <p:spPr>
+          <a:xfrm>
+            <a:off x="10789920" y="3108960"/>
+            <a:ext cx="914400" cy="411480"/>
+          </a:xfrm>
+          <a:prstGeom prst="rect">
+            <a:avLst/>
+          </a:prstGeom>
+          <a:solidFill>
+            <a:srgbClr val="FFFFFF"/>
+          </a:solidFill>
+          <a:ln>
+            <a:noFill/>
+          </a:ln>
+          <a:effectLst/>
+        </p:spPr>
+        <p:style>
+          <a:lnRef idx="1">
+            <a:schemeClr val="accent1"/>
+          </a:lnRef>
+          <a:fillRef idx="3">
+            <a:schemeClr val="accent1"/>
+          </a:fillRef>
+          <a:effectRef idx="2">
+            <a:schemeClr val="accent1"/>
+          </a:effectRef>
+          <a:fontRef idx="minor">
+            <a:schemeClr val="lt1"/>
+          </a:fontRef>
+        </p:style>
+        <p:txBody>
+          <a:bodyPr rtlCol="0" anchor="ctr"/>
+          <a:lstStyle/>
+          <a:p>
+            <a:pPr algn="ctr"/>
+          </a:p>
+        </p:txBody>
+      </p:sp>
+      <p:sp>
+        <p:nvSpPr>
+          <p:cNvPr id="35" name="TextBox 34"/>
+          <p:cNvSpPr txBox="1"/>
+          <p:nvPr/>
+        </p:nvSpPr>
+        <p:spPr>
+          <a:xfrm>
+            <a:off x="10835640" y="3145536"/>
+            <a:ext cx="822960" cy="338328"/>
+          </a:xfrm>
+          <a:prstGeom prst="rect">
+            <a:avLst/>
+          </a:prstGeom>
+          <a:noFill/>
+        </p:spPr>
+        <p:txBody>
+          <a:bodyPr wrap="square" anchor="ctr" lIns="0" rIns="0" tIns="0" bIns="0">
+            <a:spAutoFit/>
+          </a:bodyPr>
+          <a:lstStyle/>
+          <a:p>
+            <a:pPr algn="l"/>
+            <a:r>
+              <a:rPr sz="1200" b="0">
+                <a:solidFill>
+                  <a:srgbClr val="5A5A5A"/>
+                </a:solidFill>
+                <a:latin typeface="Yu Gothic"/>
+                <a:ea typeface="Yu Gothic"/>
+              </a:rPr>
+              <a:t>7.93</a:t>
+            </a:r>
+          </a:p>
+        </p:txBody>
+      </p:sp>
+      <p:sp>
+        <p:nvSpPr>
+          <p:cNvPr id="36" name="Rectangle 35"/>
+          <p:cNvSpPr/>
+          <p:nvPr/>
+        </p:nvSpPr>
+        <p:spPr>
+          <a:xfrm>
+            <a:off x="6858000" y="3520440"/>
+            <a:ext cx="2011680" cy="411480"/>
+          </a:xfrm>
+          <a:prstGeom prst="rect">
+            <a:avLst/>
+          </a:prstGeom>
+          <a:solidFill>
+            <a:srgbClr val="FDE9CE"/>
+          </a:solidFill>
+          <a:ln>
+            <a:noFill/>
+          </a:ln>
+          <a:effectLst/>
+        </p:spPr>
+        <p:style>
+          <a:lnRef idx="1">
+            <a:schemeClr val="accent1"/>
+          </a:lnRef>
+          <a:fillRef idx="3">
+            <a:schemeClr val="accent1"/>
+          </a:fillRef>
+          <a:effectRef idx="2">
+            <a:schemeClr val="accent1"/>
+          </a:effectRef>
+          <a:fontRef idx="minor">
+            <a:schemeClr val="lt1"/>
+          </a:fontRef>
+        </p:style>
+        <p:txBody>
+          <a:bodyPr rtlCol="0" anchor="ctr"/>
+          <a:lstStyle/>
+          <a:p>
+            <a:pPr algn="ctr"/>
+          </a:p>
+        </p:txBody>
+      </p:sp>
+      <p:sp>
+        <p:nvSpPr>
+          <p:cNvPr id="37" name="TextBox 36"/>
+          <p:cNvSpPr txBox="1"/>
+          <p:nvPr/>
+        </p:nvSpPr>
+        <p:spPr>
+          <a:xfrm>
+            <a:off x="6903720" y="3557016"/>
+            <a:ext cx="1920240" cy="338328"/>
+          </a:xfrm>
+          <a:prstGeom prst="rect">
+            <a:avLst/>
+          </a:prstGeom>
+          <a:noFill/>
+        </p:spPr>
+        <p:txBody>
+          <a:bodyPr wrap="square" anchor="ctr" lIns="0" rIns="0" tIns="0" bIns="0">
+            <a:spAutoFit/>
+          </a:bodyPr>
+          <a:lstStyle/>
+          <a:p>
+            <a:pPr algn="l"/>
+            <a:r>
+              <a:rPr sz="1200" b="1">
+                <a:solidFill>
+                  <a:srgbClr val="C8102E"/>
+                </a:solidFill>
+                <a:latin typeface="Yu Gothic"/>
+                <a:ea typeface="Yu Gothic"/>
+              </a:rPr>
+              <a:t>C: Hybrid (本研究)</a:t>
+            </a:r>
+          </a:p>
+        </p:txBody>
+      </p:sp>
+      <p:sp>
+        <p:nvSpPr>
+          <p:cNvPr id="38" name="Rectangle 37"/>
+          <p:cNvSpPr/>
+          <p:nvPr/>
+        </p:nvSpPr>
+        <p:spPr>
+          <a:xfrm>
+            <a:off x="8869680" y="3520440"/>
+            <a:ext cx="1005840" cy="411480"/>
+          </a:xfrm>
+          <a:prstGeom prst="rect">
+            <a:avLst/>
+          </a:prstGeom>
+          <a:solidFill>
+            <a:srgbClr val="FDE9CE"/>
+          </a:solidFill>
+          <a:ln>
+            <a:noFill/>
+          </a:ln>
+          <a:effectLst/>
+        </p:spPr>
+        <p:style>
+          <a:lnRef idx="1">
+            <a:schemeClr val="accent1"/>
+          </a:lnRef>
+          <a:fillRef idx="3">
+            <a:schemeClr val="accent1"/>
+          </a:fillRef>
+          <a:effectRef idx="2">
+            <a:schemeClr val="accent1"/>
+          </a:effectRef>
+          <a:fontRef idx="minor">
+            <a:schemeClr val="lt1"/>
+          </a:fontRef>
+        </p:style>
+        <p:txBody>
+          <a:bodyPr rtlCol="0" anchor="ctr"/>
+          <a:lstStyle/>
+          <a:p>
+            <a:pPr algn="ctr"/>
+          </a:p>
+        </p:txBody>
+      </p:sp>
+      <p:sp>
+        <p:nvSpPr>
+          <p:cNvPr id="39" name="TextBox 38"/>
+          <p:cNvSpPr txBox="1"/>
+          <p:nvPr/>
+        </p:nvSpPr>
+        <p:spPr>
+          <a:xfrm>
+            <a:off x="8915400" y="3557016"/>
+            <a:ext cx="914400" cy="338328"/>
+          </a:xfrm>
+          <a:prstGeom prst="rect">
+            <a:avLst/>
+          </a:prstGeom>
+          <a:noFill/>
+        </p:spPr>
+        <p:txBody>
+          <a:bodyPr wrap="square" anchor="ctr" lIns="0" rIns="0" tIns="0" bIns="0">
+            <a:spAutoFit/>
+          </a:bodyPr>
+          <a:lstStyle/>
+          <a:p>
+            <a:pPr algn="l"/>
+            <a:r>
+              <a:rPr sz="1200" b="1">
+                <a:solidFill>
+                  <a:srgbClr val="C8102E"/>
+                </a:solidFill>
+                <a:latin typeface="Yu Gothic"/>
+                <a:ea typeface="Yu Gothic"/>
+              </a:rPr>
+              <a:t>54.0</a:t>
+            </a:r>
+          </a:p>
+        </p:txBody>
+      </p:sp>
+      <p:sp>
+        <p:nvSpPr>
+          <p:cNvPr id="40" name="Rectangle 39"/>
+          <p:cNvSpPr/>
+          <p:nvPr/>
+        </p:nvSpPr>
+        <p:spPr>
+          <a:xfrm>
+            <a:off x="9875520" y="3520440"/>
+            <a:ext cx="914400" cy="411480"/>
+          </a:xfrm>
+          <a:prstGeom prst="rect">
+            <a:avLst/>
+          </a:prstGeom>
+          <a:solidFill>
+            <a:srgbClr val="FDE9CE"/>
+          </a:solidFill>
+          <a:ln>
+            <a:noFill/>
+          </a:ln>
+          <a:effectLst/>
+        </p:spPr>
+        <p:style>
+          <a:lnRef idx="1">
+            <a:schemeClr val="accent1"/>
+          </a:lnRef>
+          <a:fillRef idx="3">
+            <a:schemeClr val="accent1"/>
+          </a:fillRef>
+          <a:effectRef idx="2">
+            <a:schemeClr val="accent1"/>
+          </a:effectRef>
+          <a:fontRef idx="minor">
+            <a:schemeClr val="lt1"/>
+          </a:fontRef>
+        </p:style>
+        <p:txBody>
+          <a:bodyPr rtlCol="0" anchor="ctr"/>
+          <a:lstStyle/>
+          <a:p>
+            <a:pPr algn="ctr"/>
+          </a:p>
+        </p:txBody>
+      </p:sp>
+      <p:sp>
+        <p:nvSpPr>
+          <p:cNvPr id="41" name="TextBox 40"/>
+          <p:cNvSpPr txBox="1"/>
+          <p:nvPr/>
+        </p:nvSpPr>
+        <p:spPr>
+          <a:xfrm>
+            <a:off x="9921240" y="3557016"/>
+            <a:ext cx="822960" cy="338328"/>
+          </a:xfrm>
+          <a:prstGeom prst="rect">
+            <a:avLst/>
+          </a:prstGeom>
+          <a:noFill/>
+        </p:spPr>
+        <p:txBody>
+          <a:bodyPr wrap="square" anchor="ctr" lIns="0" rIns="0" tIns="0" bIns="0">
+            <a:spAutoFit/>
+          </a:bodyPr>
+          <a:lstStyle/>
+          <a:p>
+            <a:pPr algn="l"/>
+            <a:r>
+              <a:rPr sz="1200" b="1">
+                <a:solidFill>
+                  <a:srgbClr val="C8102E"/>
+                </a:solidFill>
+                <a:latin typeface="Yu Gothic"/>
+                <a:ea typeface="Yu Gothic"/>
+              </a:rPr>
+              <a:t>0.905</a:t>
+            </a:r>
+          </a:p>
+        </p:txBody>
+      </p:sp>
+      <p:sp>
+        <p:nvSpPr>
+          <p:cNvPr id="42" name="Rectangle 41"/>
+          <p:cNvSpPr/>
+          <p:nvPr/>
+        </p:nvSpPr>
+        <p:spPr>
+          <a:xfrm>
+            <a:off x="10789920" y="3520440"/>
+            <a:ext cx="914400" cy="411480"/>
+          </a:xfrm>
+          <a:prstGeom prst="rect">
+            <a:avLst/>
+          </a:prstGeom>
+          <a:solidFill>
+            <a:srgbClr val="FDE9CE"/>
+          </a:solidFill>
+          <a:ln>
+            <a:noFill/>
+          </a:ln>
+          <a:effectLst/>
+        </p:spPr>
+        <p:style>
+          <a:lnRef idx="1">
+            <a:schemeClr val="accent1"/>
+          </a:lnRef>
+          <a:fillRef idx="3">
+            <a:schemeClr val="accent1"/>
+          </a:fillRef>
+          <a:effectRef idx="2">
+            <a:schemeClr val="accent1"/>
+          </a:effectRef>
+          <a:fontRef idx="minor">
+            <a:schemeClr val="lt1"/>
+          </a:fontRef>
+        </p:style>
+        <p:txBody>
+          <a:bodyPr rtlCol="0" anchor="ctr"/>
+          <a:lstStyle/>
+          <a:p>
+            <a:pPr algn="ctr"/>
+          </a:p>
+        </p:txBody>
+      </p:sp>
+      <p:sp>
+        <p:nvSpPr>
+          <p:cNvPr id="43" name="TextBox 42"/>
+          <p:cNvSpPr txBox="1"/>
+          <p:nvPr/>
+        </p:nvSpPr>
+        <p:spPr>
+          <a:xfrm>
+            <a:off x="10835640" y="3557016"/>
+            <a:ext cx="822960" cy="338328"/>
+          </a:xfrm>
+          <a:prstGeom prst="rect">
+            <a:avLst/>
+          </a:prstGeom>
+          <a:noFill/>
+        </p:spPr>
+        <p:txBody>
+          <a:bodyPr wrap="square" anchor="ctr" lIns="0" rIns="0" tIns="0" bIns="0">
+            <a:spAutoFit/>
+          </a:bodyPr>
+          <a:lstStyle/>
+          <a:p>
+            <a:pPr algn="l"/>
+            <a:r>
+              <a:rPr sz="1200" b="1">
+                <a:solidFill>
+                  <a:srgbClr val="C8102E"/>
+                </a:solidFill>
+                <a:latin typeface="Yu Gothic"/>
+                <a:ea typeface="Yu Gothic"/>
+              </a:rPr>
+              <a:t>7.28</a:t>
+            </a:r>
+          </a:p>
+        </p:txBody>
+      </p:sp>
+      <p:sp>
+        <p:nvSpPr>
+          <p:cNvPr id="44" name="TextBox 43"/>
+          <p:cNvSpPr txBox="1"/>
+          <p:nvPr/>
+        </p:nvSpPr>
+        <p:spPr>
+          <a:xfrm>
+            <a:off x="6858000" y="4206240"/>
+            <a:ext cx="5029200" cy="365760"/>
+          </a:xfrm>
+          <a:prstGeom prst="rect">
+            <a:avLst/>
+          </a:prstGeom>
+          <a:noFill/>
+        </p:spPr>
+        <p:txBody>
+          <a:bodyPr wrap="square" anchor="t" lIns="0" rIns="0" tIns="0" bIns="0">
+            <a:spAutoFit/>
+          </a:bodyPr>
+          <a:lstStyle/>
+          <a:p>
+            <a:pPr algn="l"/>
+            <a:r>
+              <a:rPr sz="1500" b="1">
+                <a:solidFill>
+                  <a:srgbClr val="003B71"/>
+                </a:solidFill>
+                <a:latin typeface="Yu Gothic"/>
+                <a:ea typeface="Yu Gothic"/>
+              </a:rPr>
+              <a:t>■ ポイント</a:t>
+            </a:r>
+          </a:p>
+        </p:txBody>
+      </p:sp>
+      <p:sp>
+        <p:nvSpPr>
+          <p:cNvPr id="45" name="TextBox 44"/>
+          <p:cNvSpPr txBox="1"/>
+          <p:nvPr/>
+        </p:nvSpPr>
+        <p:spPr>
+          <a:xfrm>
+            <a:off x="6858000" y="4572000"/>
+            <a:ext cx="5029200" cy="1645920"/>
+          </a:xfrm>
+          <a:prstGeom prst="rect">
+            <a:avLst/>
+          </a:prstGeom>
+          <a:noFill/>
+        </p:spPr>
+        <p:txBody>
+          <a:bodyPr wrap="square" anchor="t" lIns="0" rIns="0" tIns="0" bIns="0">
+            <a:spAutoFit/>
+          </a:bodyPr>
+          <a:lstStyle/>
+          <a:p>
+            <a:pPr algn="l"/>
+            <a:r>
+              <a:rPr sz="1250" b="0">
+                <a:solidFill>
+                  <a:srgbClr val="5A5A5A"/>
+                </a:solidFill>
+                <a:latin typeface="Yu Gothic"/>
+                <a:ea typeface="Yu Gothic"/>
+              </a:rPr>
+              <a:t>・C (Hybrid) は B より MAE 10%改善</a:t>
+            </a:r>
+          </a:p>
+          <a:p>
+            <a:pPr algn="l"/>
+            <a:r>
+              <a:rPr sz="1250" b="0">
+                <a:solidFill>
+                  <a:srgbClr val="5A5A5A"/>
+                </a:solidFill>
+                <a:latin typeface="Yu Gothic"/>
+                <a:ea typeface="Yu Gothic"/>
+              </a:rPr>
+              <a:t>  (59.7 → 54.0 kW)</a:t>
+            </a:r>
+          </a:p>
+          <a:p>
+            <a:pPr algn="l"/>
+            <a:r>
+              <a:rPr sz="1250" b="0">
+                <a:solidFill>
+                  <a:srgbClr val="5A5A5A"/>
+                </a:solidFill>
+                <a:latin typeface="Yu Gothic"/>
+                <a:ea typeface="Yu Gothic"/>
+              </a:rPr>
+              <a:t/>
+            </a:r>
+          </a:p>
+          <a:p>
+            <a:pPr algn="l"/>
+            <a:r>
+              <a:rPr sz="1250" b="0">
+                <a:solidFill>
+                  <a:srgbClr val="5A5A5A"/>
+                </a:solidFill>
+                <a:latin typeface="Yu Gothic"/>
+                <a:ea typeface="Yu Gothic"/>
+              </a:rPr>
+              <a:t>・A (上限) との差はわずか 6%</a:t>
+            </a:r>
+          </a:p>
+          <a:p>
+            <a:pPr algn="l"/>
+            <a:r>
+              <a:rPr sz="1250" b="0">
+                <a:solidFill>
+                  <a:srgbClr val="5A5A5A"/>
+                </a:solidFill>
+                <a:latin typeface="Yu Gothic"/>
+                <a:ea typeface="Yu Gothic"/>
+              </a:rPr>
+              <a:t>  (50.7 → 54.0 kW)</a:t>
+            </a:r>
+          </a:p>
+          <a:p>
+            <a:pPr algn="l"/>
+            <a:r>
+              <a:rPr sz="1250" b="0">
+                <a:solidFill>
+                  <a:srgbClr val="5A5A5A"/>
+                </a:solidFill>
+                <a:latin typeface="Yu Gothic"/>
+                <a:ea typeface="Yu Gothic"/>
+              </a:rPr>
+              <a:t/>
+            </a:r>
+          </a:p>
+          <a:p>
+            <a:pPr algn="l"/>
+            <a:r>
+              <a:rPr sz="1250" b="0">
+                <a:solidFill>
+                  <a:srgbClr val="5A5A5A"/>
+                </a:solidFill>
+                <a:latin typeface="Yu Gothic"/>
+                <a:ea typeface="Yu Gothic"/>
+              </a:rPr>
+              <a:t>・上限値に迫る精度を実運用で実現</a:t>
+            </a:r>
+          </a:p>
+        </p:txBody>
+      </p:sp>
+    </p:spTree>
+  </p:cSld>
+  <p:clrMapOvr>
+    <a:masterClrMapping/>
+  </p:clrMapOvr>
+</p:sld>
+</file>
+
+<file path=ppt/slides/slide11.xml><?xml version="1.0" encoding="utf-8"?>
+<p:sld xmlns:a="http://schemas.openxmlformats.org/drawingml/2006/main" xmlns:p="http://schemas.openxmlformats.org/presentationml/2006/main" xmlns:r="http://schemas.openxmlformats.org/officeDocument/2006/relationships">
+  <p:cSld>
+    <p:spTree>
+      <p:nvGrpSpPr>
+        <p:cNvPr id="1" name=""/>
+        <p:cNvGrpSpPr/>
+        <p:nvPr/>
+      </p:nvGrpSpPr>
+      <p:grpSpPr/>
+      <p:sp>
+        <p:nvSpPr>
+          <p:cNvPr id="2" name="Rectangle 1"/>
+          <p:cNvSpPr/>
+          <p:nvPr/>
+        </p:nvSpPr>
+        <p:spPr>
+          <a:xfrm>
+            <a:off x="0" y="0"/>
+            <a:ext cx="12191695" cy="320040"/>
+          </a:xfrm>
+          <a:prstGeom prst="rect">
+            <a:avLst/>
+          </a:prstGeom>
+          <a:solidFill>
+            <a:srgbClr val="003B71"/>
+          </a:solidFill>
+          <a:ln>
+            <a:noFill/>
+          </a:ln>
+          <a:effectLst/>
+        </p:spPr>
+        <p:style>
+          <a:lnRef idx="1">
+            <a:schemeClr val="accent1"/>
+          </a:lnRef>
+          <a:fillRef idx="3">
+            <a:schemeClr val="accent1"/>
+          </a:fillRef>
+          <a:effectRef idx="2">
+            <a:schemeClr val="accent1"/>
+          </a:effectRef>
+          <a:fontRef idx="minor">
+            <a:schemeClr val="lt1"/>
+          </a:fontRef>
+        </p:style>
+        <p:txBody>
+          <a:bodyPr rtlCol="0" anchor="ctr"/>
+          <a:lstStyle/>
+          <a:p>
+            <a:pPr algn="ctr"/>
+          </a:p>
+        </p:txBody>
+      </p:sp>
+      <p:sp>
+        <p:nvSpPr>
+          <p:cNvPr id="3" name="TextBox 2"/>
+          <p:cNvSpPr txBox="1"/>
+          <p:nvPr/>
+        </p:nvSpPr>
+        <p:spPr>
+          <a:xfrm>
+            <a:off x="274320" y="36576"/>
+            <a:ext cx="7315200" cy="246888"/>
+          </a:xfrm>
+          <a:prstGeom prst="rect">
+            <a:avLst/>
+          </a:prstGeom>
+          <a:noFill/>
+        </p:spPr>
+        <p:txBody>
+          <a:bodyPr wrap="square" anchor="ctr" lIns="0" rIns="0" tIns="0" bIns="0">
+            <a:spAutoFit/>
+          </a:bodyPr>
+          <a:lstStyle/>
+          <a:p>
+            <a:pPr algn="l"/>
+            <a:r>
+              <a:rPr sz="1100" b="1">
+                <a:solidFill>
+                  <a:srgbClr val="FFFFFF"/>
+                </a:solidFill>
+                <a:latin typeface="Yu Gothic"/>
+                <a:ea typeface="Yu Gothic"/>
+              </a:rPr>
+              <a:t>省エネ研究 (山口大学)</a:t>
+            </a:r>
+          </a:p>
+        </p:txBody>
+      </p:sp>
+      <p:sp>
+        <p:nvSpPr>
+          <p:cNvPr id="4" name="TextBox 3"/>
+          <p:cNvSpPr txBox="1"/>
+          <p:nvPr/>
+        </p:nvSpPr>
+        <p:spPr>
+          <a:xfrm>
+            <a:off x="10515600" y="36576"/>
+            <a:ext cx="1463040" cy="246888"/>
+          </a:xfrm>
+          <a:prstGeom prst="rect">
+            <a:avLst/>
+          </a:prstGeom>
+          <a:noFill/>
+        </p:spPr>
+        <p:txBody>
+          <a:bodyPr wrap="square" anchor="ctr" lIns="0" rIns="0" tIns="0" bIns="0">
+            <a:spAutoFit/>
+          </a:bodyPr>
+          <a:lstStyle/>
+          <a:p>
+            <a:pPr algn="r"/>
+            <a:r>
+              <a:rPr sz="1000" b="0">
+                <a:solidFill>
+                  <a:srgbClr val="FFFFFF"/>
+                </a:solidFill>
+                <a:latin typeface="Yu Gothic"/>
+                <a:ea typeface="Yu Gothic"/>
+              </a:rPr>
+              <a:t>Slide 11 / 12</a:t>
+            </a:r>
+          </a:p>
+        </p:txBody>
+      </p:sp>
+      <p:sp>
+        <p:nvSpPr>
+          <p:cNvPr id="5" name="Rectangle 4"/>
+          <p:cNvSpPr/>
+          <p:nvPr/>
+        </p:nvSpPr>
+        <p:spPr>
+          <a:xfrm>
+            <a:off x="0" y="6629400"/>
+            <a:ext cx="12191695" cy="228600"/>
+          </a:xfrm>
+          <a:prstGeom prst="rect">
+            <a:avLst/>
+          </a:prstGeom>
+          <a:solidFill>
+            <a:srgbClr val="003B71"/>
+          </a:solidFill>
+          <a:ln>
+            <a:noFill/>
+          </a:ln>
+          <a:effectLst/>
+        </p:spPr>
+        <p:style>
+          <a:lnRef idx="1">
+            <a:schemeClr val="accent1"/>
+          </a:lnRef>
+          <a:fillRef idx="3">
+            <a:schemeClr val="accent1"/>
+          </a:fillRef>
+          <a:effectRef idx="2">
+            <a:schemeClr val="accent1"/>
+          </a:effectRef>
+          <a:fontRef idx="minor">
+            <a:schemeClr val="lt1"/>
+          </a:fontRef>
+        </p:style>
+        <p:txBody>
+          <a:bodyPr rtlCol="0" anchor="ctr"/>
+          <a:lstStyle/>
+          <a:p>
+            <a:pPr algn="ctr"/>
+          </a:p>
+        </p:txBody>
+      </p:sp>
+      <p:sp>
+        <p:nvSpPr>
+          <p:cNvPr id="6" name="TextBox 5"/>
+          <p:cNvSpPr txBox="1"/>
+          <p:nvPr/>
+        </p:nvSpPr>
+        <p:spPr>
+          <a:xfrm>
+            <a:off x="274320" y="6656832"/>
+            <a:ext cx="9144000" cy="182880"/>
+          </a:xfrm>
+          <a:prstGeom prst="rect">
+            <a:avLst/>
+          </a:prstGeom>
+          <a:noFill/>
+        </p:spPr>
+        <p:txBody>
+          <a:bodyPr wrap="square" anchor="ctr" lIns="0" rIns="0" tIns="0" bIns="0">
+            <a:spAutoFit/>
+          </a:bodyPr>
+          <a:lstStyle/>
+          <a:p>
+            <a:pPr algn="l"/>
+            <a:r>
+              <a:rPr sz="850" b="0">
+                <a:solidFill>
+                  <a:srgbClr val="FFFFFF"/>
+                </a:solidFill>
+                <a:latin typeface="Yu Gothic"/>
+                <a:ea typeface="Yu Gothic"/>
+              </a:rPr>
+              <a:t>山口大学 (Yamaguchi University) — 省エネ研究会 2026</a:t>
+            </a:r>
+          </a:p>
+        </p:txBody>
+      </p:sp>
+      <p:sp>
+        <p:nvSpPr>
+          <p:cNvPr id="7" name="TextBox 6"/>
+          <p:cNvSpPr txBox="1"/>
+          <p:nvPr/>
+        </p:nvSpPr>
+        <p:spPr>
+          <a:xfrm>
+            <a:off x="365760" y="457200"/>
+            <a:ext cx="11430000" cy="548640"/>
+          </a:xfrm>
+          <a:prstGeom prst="rect">
+            <a:avLst/>
+          </a:prstGeom>
+          <a:noFill/>
+        </p:spPr>
+        <p:txBody>
+          <a:bodyPr wrap="square" anchor="t" lIns="0" rIns="0" tIns="0" bIns="0">
+            <a:spAutoFit/>
+          </a:bodyPr>
+          <a:lstStyle/>
+          <a:p>
+            <a:pPr algn="l"/>
+            <a:r>
+              <a:rPr sz="2600" b="1">
+                <a:solidFill>
+                  <a:srgbClr val="003B71"/>
+                </a:solidFill>
+                <a:latin typeface="Yu Gothic"/>
+                <a:ea typeface="Yu Gothic"/>
+              </a:rPr>
+              <a:t>結果③ 何が予測を決めているか</a:t>
+            </a:r>
+          </a:p>
+        </p:txBody>
+      </p:sp>
+      <p:sp>
+        <p:nvSpPr>
+          <p:cNvPr id="8" name="Rectangle 7"/>
+          <p:cNvSpPr/>
+          <p:nvPr/>
+        </p:nvSpPr>
+        <p:spPr>
+          <a:xfrm>
+            <a:off x="365760" y="1024128"/>
+            <a:ext cx="1097280" cy="54864"/>
+          </a:xfrm>
+          <a:prstGeom prst="rect">
+            <a:avLst/>
+          </a:prstGeom>
+          <a:solidFill>
+            <a:srgbClr val="E78A00"/>
+          </a:solidFill>
+          <a:ln>
+            <a:noFill/>
+          </a:ln>
+          <a:effectLst/>
+        </p:spPr>
+        <p:style>
+          <a:lnRef idx="1">
+            <a:schemeClr val="accent1"/>
+          </a:lnRef>
+          <a:fillRef idx="3">
+            <a:schemeClr val="accent1"/>
+          </a:fillRef>
+          <a:effectRef idx="2">
+            <a:schemeClr val="accent1"/>
+          </a:effectRef>
+          <a:fontRef idx="minor">
+            <a:schemeClr val="lt1"/>
+          </a:fontRef>
+        </p:style>
+        <p:txBody>
+          <a:bodyPr rtlCol="0" anchor="ctr"/>
+          <a:lstStyle/>
+          <a:p>
+            <a:pPr algn="ctr"/>
+          </a:p>
+        </p:txBody>
+      </p:sp>
+      <p:sp>
+        <p:nvSpPr>
+          <p:cNvPr id="9" name="TextBox 8"/>
+          <p:cNvSpPr txBox="1"/>
+          <p:nvPr/>
+        </p:nvSpPr>
+        <p:spPr>
+          <a:xfrm>
+            <a:off x="365760" y="1097280"/>
+            <a:ext cx="11430000" cy="365760"/>
+          </a:xfrm>
+          <a:prstGeom prst="rect">
+            <a:avLst/>
+          </a:prstGeom>
+          <a:noFill/>
+        </p:spPr>
+        <p:txBody>
+          <a:bodyPr wrap="square" anchor="t" lIns="0" rIns="0" tIns="0" bIns="0">
+            <a:spAutoFit/>
+          </a:bodyPr>
+          <a:lstStyle/>
+          <a:p>
+            <a:pPr algn="l"/>
+            <a:r>
+              <a:rPr sz="1400" b="0">
+                <a:solidFill>
+                  <a:srgbClr val="5A5A5A"/>
+                </a:solidFill>
+                <a:latin typeface="Yu Gothic"/>
+                <a:ea typeface="Yu Gothic"/>
+              </a:rPr>
+              <a:t>SHAP値で見る上位特徴量</a:t>
+            </a:r>
+          </a:p>
+        </p:txBody>
+      </p:sp>
+      <p:pic>
+        <p:nvPicPr>
+          <p:cNvPr id="10" name="Picture 9" descr="pres_06_shap_top10.png"/>
+          <p:cNvPicPr>
+            <a:picLocks noChangeAspect="1"/>
+          </p:cNvPicPr>
+          <p:nvPr/>
+        </p:nvPicPr>
+        <p:blipFill>
+          <a:blip r:embed="rId2"/>
+          <a:stretch>
+            <a:fillRect/>
+          </a:stretch>
+        </p:blipFill>
+        <p:spPr>
+          <a:xfrm>
+            <a:off x="365760" y="1828800"/>
+            <a:ext cx="7315200" cy="4114800"/>
+          </a:xfrm>
+          <a:prstGeom prst="rect">
+            <a:avLst/>
+          </a:prstGeom>
+        </p:spPr>
+      </p:pic>
+      <p:sp>
+        <p:nvSpPr>
+          <p:cNvPr id="11" name="TextBox 10"/>
+          <p:cNvSpPr txBox="1"/>
+          <p:nvPr/>
+        </p:nvSpPr>
+        <p:spPr>
+          <a:xfrm>
+            <a:off x="7863840" y="1828800"/>
+            <a:ext cx="4114800" cy="365760"/>
+          </a:xfrm>
+          <a:prstGeom prst="rect">
+            <a:avLst/>
+          </a:prstGeom>
+          <a:noFill/>
+        </p:spPr>
+        <p:txBody>
+          <a:bodyPr wrap="square" anchor="t" lIns="0" rIns="0" tIns="0" bIns="0">
+            <a:spAutoFit/>
+          </a:bodyPr>
+          <a:lstStyle/>
+          <a:p>
+            <a:pPr algn="l"/>
+            <a:r>
+              <a:rPr sz="1500" b="1">
+                <a:solidFill>
+                  <a:srgbClr val="003B71"/>
+                </a:solidFill>
+                <a:latin typeface="Yu Gothic"/>
+                <a:ea typeface="Yu Gothic"/>
+              </a:rPr>
+              <a:t>■ 解釈</a:t>
+            </a:r>
+          </a:p>
+        </p:txBody>
+      </p:sp>
+      <p:sp>
+        <p:nvSpPr>
+          <p:cNvPr id="12" name="TextBox 11"/>
+          <p:cNvSpPr txBox="1"/>
+          <p:nvPr/>
+        </p:nvSpPr>
+        <p:spPr>
+          <a:xfrm>
+            <a:off x="7863840" y="2286000"/>
+            <a:ext cx="4114800" cy="4114800"/>
+          </a:xfrm>
+          <a:prstGeom prst="rect">
+            <a:avLst/>
+          </a:prstGeom>
+          <a:noFill/>
+        </p:spPr>
+        <p:txBody>
+          <a:bodyPr wrap="square" anchor="t" lIns="0" rIns="0" tIns="0" bIns="0">
+            <a:spAutoFit/>
+          </a:bodyPr>
+          <a:lstStyle/>
+          <a:p>
+            <a:pPr algn="l"/>
+            <a:r>
+              <a:rPr sz="1250" b="0">
+                <a:solidFill>
+                  <a:srgbClr val="5A5A5A"/>
+                </a:solidFill>
+                <a:latin typeface="Yu Gothic"/>
+                <a:ea typeface="Yu Gothic"/>
+              </a:rPr>
+              <a:t>1. 前週同時刻の負荷が最重要</a:t>
+            </a:r>
+          </a:p>
+          <a:p>
+            <a:pPr algn="l"/>
+            <a:r>
+              <a:rPr sz="1250" b="0">
+                <a:solidFill>
+                  <a:srgbClr val="5A5A5A"/>
+                </a:solidFill>
+                <a:latin typeface="Yu Gothic"/>
+                <a:ea typeface="Yu Gothic"/>
+              </a:rPr>
+              <a:t>    → 週周期パターンが強い</a:t>
+            </a:r>
+          </a:p>
+          <a:p>
+            <a:pPr algn="l"/>
+            <a:r>
+              <a:rPr sz="1250" b="0">
+                <a:solidFill>
+                  <a:srgbClr val="5A5A5A"/>
+                </a:solidFill>
+                <a:latin typeface="Yu Gothic"/>
+                <a:ea typeface="Yu Gothic"/>
+              </a:rPr>
+              <a:t/>
+            </a:r>
+          </a:p>
+          <a:p>
+            <a:pPr algn="l"/>
+            <a:r>
+              <a:rPr sz="1250" b="0">
+                <a:solidFill>
+                  <a:srgbClr val="5A5A5A"/>
+                </a:solidFill>
+                <a:latin typeface="Yu Gothic"/>
+                <a:ea typeface="Yu Gothic"/>
+              </a:rPr>
+              <a:t>2. 営業日 / 休日フラグ</a:t>
+            </a:r>
+          </a:p>
+          <a:p>
+            <a:pPr algn="l"/>
+            <a:r>
+              <a:rPr sz="1250" b="0">
+                <a:solidFill>
+                  <a:srgbClr val="5A5A5A"/>
+                </a:solidFill>
+                <a:latin typeface="Yu Gothic"/>
+                <a:ea typeface="Yu Gothic"/>
+              </a:rPr>
+              <a:t>    → 平日と休日で大差</a:t>
+            </a:r>
+          </a:p>
+          <a:p>
+            <a:pPr algn="l"/>
+            <a:r>
+              <a:rPr sz="1250" b="0">
+                <a:solidFill>
+                  <a:srgbClr val="5A5A5A"/>
+                </a:solidFill>
+                <a:latin typeface="Yu Gothic"/>
+                <a:ea typeface="Yu Gothic"/>
+              </a:rPr>
+              <a:t/>
+            </a:r>
+          </a:p>
+          <a:p>
+            <a:pPr algn="l"/>
+            <a:r>
+              <a:rPr sz="1250" b="0">
+                <a:solidFill>
+                  <a:srgbClr val="5A5A5A"/>
+                </a:solidFill>
+                <a:latin typeface="Yu Gothic"/>
+                <a:ea typeface="Yu Gothic"/>
+              </a:rPr>
+              <a:t>3. 前日同時刻の気温</a:t>
+            </a:r>
+          </a:p>
+          <a:p>
+            <a:pPr algn="l"/>
+            <a:r>
+              <a:rPr sz="1250" b="0">
+                <a:solidFill>
+                  <a:srgbClr val="5A5A5A"/>
+                </a:solidFill>
+                <a:latin typeface="Yu Gothic"/>
+                <a:ea typeface="Yu Gothic"/>
+              </a:rPr>
+              <a:t>    → 暑熱の連続性を反映</a:t>
+            </a:r>
+          </a:p>
+          <a:p>
+            <a:pPr algn="l"/>
+            <a:r>
+              <a:rPr sz="1250" b="0">
+                <a:solidFill>
+                  <a:srgbClr val="5A5A5A"/>
+                </a:solidFill>
+                <a:latin typeface="Yu Gothic"/>
+                <a:ea typeface="Yu Gothic"/>
+              </a:rPr>
+              <a:t/>
+            </a:r>
+          </a:p>
+          <a:p>
+            <a:pPr algn="l"/>
+            <a:r>
+              <a:rPr sz="1250" b="0">
+                <a:solidFill>
+                  <a:srgbClr val="5A5A5A"/>
+                </a:solidFill>
+                <a:latin typeface="Yu Gothic"/>
+                <a:ea typeface="Yu Gothic"/>
+              </a:rPr>
+              <a:t>4. 日射量 (予報)</a:t>
+            </a:r>
+          </a:p>
+          <a:p>
+            <a:pPr algn="l"/>
+            <a:r>
+              <a:rPr sz="1250" b="0">
+                <a:solidFill>
+                  <a:srgbClr val="5A5A5A"/>
+                </a:solidFill>
+                <a:latin typeface="Yu Gothic"/>
+                <a:ea typeface="Yu Gothic"/>
+              </a:rPr>
+              <a:t>    → 翌日の冷房需要を予測</a:t>
+            </a:r>
+          </a:p>
+        </p:txBody>
+      </p:sp>
+    </p:spTree>
+  </p:cSld>
+  <p:clrMapOvr>
+    <a:masterClrMapping/>
+  </p:clrMapOvr>
+</p:sld>
+</file>
+
+<file path=ppt/slides/slide12.xml><?xml version="1.0" encoding="utf-8"?>
+<p:sld xmlns:a="http://schemas.openxmlformats.org/drawingml/2006/main" xmlns:p="http://schemas.openxmlformats.org/presentationml/2006/main" xmlns:r="http://schemas.openxmlformats.org/officeDocument/2006/relationships">
+  <p:cSld>
+    <p:spTree>
+      <p:nvGrpSpPr>
+        <p:cNvPr id="1" name=""/>
+        <p:cNvGrpSpPr/>
+        <p:nvPr/>
+      </p:nvGrpSpPr>
+      <p:grpSpPr/>
+      <p:sp>
+        <p:nvSpPr>
+          <p:cNvPr id="2" name="Rectangle 1"/>
+          <p:cNvSpPr/>
+          <p:nvPr/>
+        </p:nvSpPr>
+        <p:spPr>
+          <a:xfrm>
+            <a:off x="0" y="0"/>
+            <a:ext cx="12191695" cy="320040"/>
+          </a:xfrm>
+          <a:prstGeom prst="rect">
+            <a:avLst/>
+          </a:prstGeom>
+          <a:solidFill>
+            <a:srgbClr val="003B71"/>
+          </a:solidFill>
+          <a:ln>
+            <a:noFill/>
+          </a:ln>
+          <a:effectLst/>
+        </p:spPr>
+        <p:style>
+          <a:lnRef idx="1">
+            <a:schemeClr val="accent1"/>
+          </a:lnRef>
+          <a:fillRef idx="3">
+            <a:schemeClr val="accent1"/>
+          </a:fillRef>
+          <a:effectRef idx="2">
+            <a:schemeClr val="accent1"/>
+          </a:effectRef>
+          <a:fontRef idx="minor">
+            <a:schemeClr val="lt1"/>
+          </a:fontRef>
+        </p:style>
+        <p:txBody>
+          <a:bodyPr rtlCol="0" anchor="ctr"/>
+          <a:lstStyle/>
+          <a:p>
+            <a:pPr algn="ctr"/>
+          </a:p>
+        </p:txBody>
+      </p:sp>
+      <p:sp>
+        <p:nvSpPr>
+          <p:cNvPr id="3" name="TextBox 2"/>
+          <p:cNvSpPr txBox="1"/>
+          <p:nvPr/>
+        </p:nvSpPr>
+        <p:spPr>
+          <a:xfrm>
+            <a:off x="274320" y="36576"/>
+            <a:ext cx="7315200" cy="246888"/>
+          </a:xfrm>
+          <a:prstGeom prst="rect">
+            <a:avLst/>
+          </a:prstGeom>
+          <a:noFill/>
+        </p:spPr>
+        <p:txBody>
+          <a:bodyPr wrap="square" anchor="ctr" lIns="0" rIns="0" tIns="0" bIns="0">
+            <a:spAutoFit/>
+          </a:bodyPr>
+          <a:lstStyle/>
+          <a:p>
+            <a:pPr algn="l"/>
+            <a:r>
+              <a:rPr sz="1100" b="1">
+                <a:solidFill>
+                  <a:srgbClr val="FFFFFF"/>
+                </a:solidFill>
+                <a:latin typeface="Yu Gothic"/>
+                <a:ea typeface="Yu Gothic"/>
+              </a:rPr>
+              <a:t>省エネ研究 (山口大学)</a:t>
+            </a:r>
+          </a:p>
+        </p:txBody>
+      </p:sp>
+      <p:sp>
+        <p:nvSpPr>
+          <p:cNvPr id="4" name="TextBox 3"/>
+          <p:cNvSpPr txBox="1"/>
+          <p:nvPr/>
+        </p:nvSpPr>
+        <p:spPr>
+          <a:xfrm>
+            <a:off x="10515600" y="36576"/>
+            <a:ext cx="1463040" cy="246888"/>
+          </a:xfrm>
+          <a:prstGeom prst="rect">
+            <a:avLst/>
+          </a:prstGeom>
+          <a:noFill/>
+        </p:spPr>
+        <p:txBody>
+          <a:bodyPr wrap="square" anchor="ctr" lIns="0" rIns="0" tIns="0" bIns="0">
+            <a:spAutoFit/>
+          </a:bodyPr>
+          <a:lstStyle/>
+          <a:p>
+            <a:pPr algn="r"/>
+            <a:r>
+              <a:rPr sz="1000" b="0">
+                <a:solidFill>
+                  <a:srgbClr val="FFFFFF"/>
+                </a:solidFill>
+                <a:latin typeface="Yu Gothic"/>
+                <a:ea typeface="Yu Gothic"/>
+              </a:rPr>
+              <a:t>Slide 12 / 12</a:t>
             </a:r>
           </a:p>
         </p:txBody>
@@ -5833,7 +8437,7 @@
                 <a:latin typeface="Yu Gothic"/>
                 <a:ea typeface="Yu Gothic"/>
               </a:rPr>
-              <a:t>Slide 2 / 10</a:t>
+              <a:t>Slide 2 / 12</a:t>
             </a:r>
           </a:p>
         </p:txBody>
@@ -6766,7 +9370,7 @@
                 <a:latin typeface="Yu Gothic"/>
                 <a:ea typeface="Yu Gothic"/>
               </a:rPr>
-              <a:t>Slide 3 / 10</a:t>
+              <a:t>Slide 3 / 12</a:t>
             </a:r>
           </a:p>
         </p:txBody>
@@ -7680,7 +10284,7 @@
                 <a:latin typeface="Yu Gothic"/>
                 <a:ea typeface="Yu Gothic"/>
               </a:rPr>
-              <a:t>Slide 4 / 10</a:t>
+              <a:t>Slide 4 / 12</a:t>
             </a:r>
           </a:p>
         </p:txBody>
@@ -8414,7 +11018,7 @@
                 <a:latin typeface="Yu Gothic"/>
                 <a:ea typeface="Yu Gothic"/>
               </a:rPr>
-              <a:t>Slide 5 / 10</a:t>
+              <a:t>Slide 5 / 12</a:t>
             </a:r>
           </a:p>
         </p:txBody>
@@ -8853,7 +11457,7 @@
                 <a:latin typeface="Yu Gothic"/>
                 <a:ea typeface="Yu Gothic"/>
               </a:rPr>
-              <a:t>Slide 6 / 10</a:t>
+              <a:t>Slide 6 / 12</a:t>
             </a:r>
           </a:p>
         </p:txBody>
@@ -9256,7 +11860,7 @@
                 <a:latin typeface="Yu Gothic"/>
                 <a:ea typeface="Yu Gothic"/>
               </a:rPr>
-              <a:t>Slide 7 / 10</a:t>
+              <a:t>Slide 7 / 12</a:t>
             </a:r>
           </a:p>
         </p:txBody>
@@ -9372,7 +11976,7 @@
                 <a:latin typeface="Yu Gothic"/>
                 <a:ea typeface="Yu Gothic"/>
               </a:rPr>
-              <a:t>結果① テスト期間の予測</a:t>
+              <a:t>気象 × 電力の相関分析</a:t>
             </a:r>
           </a:p>
         </p:txBody>
@@ -9452,14 +12056,14 @@
                 <a:latin typeface="Yu Gothic"/>
                 <a:ea typeface="Yu Gothic"/>
               </a:rPr>
-              <a:t>提案手法 (Hybrid):  MAE = 54.0 kW,  R² = 0.905,  MAPE = 7.28%</a:t>
+              <a:t>どの気象要素が電力消費に最も影響するか</a:t>
             </a:r>
           </a:p>
         </p:txBody>
       </p:sp>
       <p:pic>
         <p:nvPicPr>
-          <p:cNvPr id="10" name="Picture 9" descr="pres_04_holdout_timeseries.png"/>
+          <p:cNvPr id="10" name="Picture 9" descr="corr_01_pearson_heatmap.png"/>
           <p:cNvPicPr>
             <a:picLocks noChangeAspect="1"/>
           </p:cNvPicPr>
@@ -9474,7 +12078,7 @@
         <p:spPr>
           <a:xfrm>
             <a:off x="365760" y="1737360"/>
-            <a:ext cx="11430000" cy="4675909"/>
+            <a:ext cx="6400800" cy="4267200"/>
           </a:xfrm>
           <a:prstGeom prst="rect">
             <a:avLst/>
@@ -9489,8 +12093,8 @@
         </p:nvSpPr>
         <p:spPr>
           <a:xfrm>
-            <a:off x="365760" y="5760720"/>
-            <a:ext cx="11430000" cy="365760"/>
+            <a:off x="6949440" y="1783080"/>
+            <a:ext cx="4937760" cy="365760"/>
           </a:xfrm>
           <a:prstGeom prst="rect">
             <a:avLst/>
@@ -9505,14 +12109,14 @@
           <a:p>
             <a:pPr algn="l"/>
             <a:r>
-              <a:rPr sz="1300" b="1">
+              <a:rPr sz="1500" b="1">
                 <a:solidFill>
                   <a:srgbClr val="003B71"/>
                 </a:solidFill>
                 <a:latin typeface="Yu Gothic"/>
                 <a:ea typeface="Yu Gothic"/>
               </a:rPr>
-              <a:t>■ 青: 実測値    オレンジ: 予測値    赤点線: P80閾値 (SDR発令検討基準)</a:t>
+              <a:t>■ 主な所見</a:t>
             </a:r>
           </a:p>
         </p:txBody>
@@ -9525,8 +12129,8 @@
         </p:nvSpPr>
         <p:spPr>
           <a:xfrm>
-            <a:off x="365760" y="6217920"/>
-            <a:ext cx="11430000" cy="457200"/>
+            <a:off x="6949440" y="2194560"/>
+            <a:ext cx="4937760" cy="1828800"/>
           </a:xfrm>
           <a:prstGeom prst="rect">
             <a:avLst/>
@@ -9541,14 +12145,165 @@
           <a:p>
             <a:pPr algn="l"/>
             <a:r>
-              <a:rPr sz="1200" b="0">
+              <a:rPr sz="1250" b="0">
                 <a:solidFill>
                   <a:srgbClr val="5A5A5A"/>
                 </a:solidFill>
                 <a:latin typeface="Yu Gothic"/>
                 <a:ea typeface="Yu Gothic"/>
               </a:rPr>
-              <a:t>・予測線は実測線を概ね追従。複数のピーク日 (10/07, 10/14, 10/22) を正しく捕捉。</a:t>
+              <a:t>1. 最強の正相関: 日射量</a:t>
+            </a:r>
+          </a:p>
+          <a:p>
+            <a:pPr algn="l"/>
+            <a:r>
+              <a:rPr sz="1250" b="0">
+                <a:solidFill>
+                  <a:srgbClr val="5A5A5A"/>
+                </a:solidFill>
+                <a:latin typeface="Yu Gothic"/>
+                <a:ea typeface="Yu Gothic"/>
+              </a:rPr>
+              <a:t>    Pearson r = +0.67 (時間別)</a:t>
+            </a:r>
+          </a:p>
+          <a:p>
+            <a:pPr algn="l"/>
+            <a:r>
+              <a:rPr sz="1250" b="0">
+                <a:solidFill>
+                  <a:srgbClr val="5A5A5A"/>
+                </a:solidFill>
+                <a:latin typeface="Yu Gothic"/>
+                <a:ea typeface="Yu Gothic"/>
+              </a:rPr>
+              <a:t/>
+            </a:r>
+          </a:p>
+          <a:p>
+            <a:pPr algn="l"/>
+            <a:r>
+              <a:rPr sz="1250" b="0">
+                <a:solidFill>
+                  <a:srgbClr val="5A5A5A"/>
+                </a:solidFill>
+                <a:latin typeface="Yu Gothic"/>
+                <a:ea typeface="Yu Gothic"/>
+              </a:rPr>
+              <a:t>2. 強い正相関: 気温</a:t>
+            </a:r>
+          </a:p>
+          <a:p>
+            <a:pPr algn="l"/>
+            <a:r>
+              <a:rPr sz="1250" b="0">
+                <a:solidFill>
+                  <a:srgbClr val="5A5A5A"/>
+                </a:solidFill>
+                <a:latin typeface="Yu Gothic"/>
+                <a:ea typeface="Yu Gothic"/>
+              </a:rPr>
+              <a:t>    Pearson r = +0.57</a:t>
+            </a:r>
+          </a:p>
+          <a:p>
+            <a:pPr algn="l"/>
+            <a:r>
+              <a:rPr sz="1250" b="0">
+                <a:solidFill>
+                  <a:srgbClr val="5A5A5A"/>
+                </a:solidFill>
+                <a:latin typeface="Yu Gothic"/>
+                <a:ea typeface="Yu Gothic"/>
+              </a:rPr>
+              <a:t/>
+            </a:r>
+          </a:p>
+          <a:p>
+            <a:pPr algn="l"/>
+            <a:r>
+              <a:rPr sz="1250" b="0">
+                <a:solidFill>
+                  <a:srgbClr val="5A5A5A"/>
+                </a:solidFill>
+                <a:latin typeface="Yu Gothic"/>
+                <a:ea typeface="Yu Gothic"/>
+              </a:rPr>
+              <a:t>3. 強い負相関: 湿度</a:t>
+            </a:r>
+          </a:p>
+          <a:p>
+            <a:pPr algn="l"/>
+            <a:r>
+              <a:rPr sz="1250" b="0">
+                <a:solidFill>
+                  <a:srgbClr val="5A5A5A"/>
+                </a:solidFill>
+                <a:latin typeface="Yu Gothic"/>
+                <a:ea typeface="Yu Gothic"/>
+              </a:rPr>
+              <a:t>    Pearson r = −0.52</a:t>
+            </a:r>
+          </a:p>
+        </p:txBody>
+      </p:sp>
+      <p:pic>
+        <p:nvPicPr>
+          <p:cNvPr id="13" name="Picture 12" descr="corr_07_standardized_beta.png"/>
+          <p:cNvPicPr>
+            <a:picLocks noChangeAspect="1"/>
+          </p:cNvPicPr>
+          <p:nvPr/>
+        </p:nvPicPr>
+        <p:blipFill>
+          <a:blip r:embed="rId3"/>
+          <a:stretch>
+            <a:fillRect/>
+          </a:stretch>
+        </p:blipFill>
+        <p:spPr>
+          <a:xfrm>
+            <a:off x="6949440" y="4114800"/>
+            <a:ext cx="5029200" cy="3143250"/>
+          </a:xfrm>
+          <a:prstGeom prst="rect">
+            <a:avLst/>
+          </a:prstGeom>
+        </p:spPr>
+      </p:pic>
+      <p:sp>
+        <p:nvSpPr>
+          <p:cNvPr id="14" name="TextBox 13"/>
+          <p:cNvSpPr txBox="1"/>
+          <p:nvPr/>
+        </p:nvSpPr>
+        <p:spPr>
+          <a:xfrm>
+            <a:off x="365760" y="6126480"/>
+            <a:ext cx="6400800" cy="365760"/>
+          </a:xfrm>
+          <a:prstGeom prst="rect">
+            <a:avLst/>
+          </a:prstGeom>
+          <a:noFill/>
+        </p:spPr>
+        <p:txBody>
+          <a:bodyPr wrap="square" anchor="t" lIns="0" rIns="0" tIns="0" bIns="0">
+            <a:spAutoFit/>
+          </a:bodyPr>
+          <a:lstStyle/>
+          <a:p>
+            <a:pPr algn="l"/>
+            <a:r>
+              <a:rPr sz="1200" b="1">
+                <a:solidFill>
+                  <a:srgbClr val="E78A00"/>
+                </a:solidFill>
+                <a:latin typeface="Yu Gothic"/>
+                <a:ea typeface="Yu Gothic"/>
+              </a:rPr>
+              <a:t>■ 線形重回帰でも気象だけで b00 分散の 53% を説明</a:t>
             </a:r>
           </a:p>
         </p:txBody>
@@ -9682,7 +12437,7 @@
                 <a:latin typeface="Yu Gothic"/>
                 <a:ea typeface="Yu Gothic"/>
               </a:rPr>
-              <a:t>Slide 8 / 10</a:t>
+              <a:t>Slide 8 / 12</a:t>
             </a:r>
           </a:p>
         </p:txBody>
@@ -9798,7 +12553,7 @@
                 <a:latin typeface="Yu Gothic"/>
                 <a:ea typeface="Yu Gothic"/>
               </a:rPr>
-              <a:t>結果② 予測 vs 実測の対応</a:t>
+              <a:t>主成分分析 (PCA)</a:t>
             </a:r>
           </a:p>
         </p:txBody>
@@ -9878,14 +12633,14 @@
                 <a:latin typeface="Yu Gothic"/>
                 <a:ea typeface="Yu Gothic"/>
               </a:rPr>
-              <a:t>散布図で見る予測精度  —  MAE 54.0 kW, MAPE 7.28%</a:t>
+              <a:t>気象10変数の本質を 3 つの主成分に圧縮</a:t>
             </a:r>
           </a:p>
         </p:txBody>
       </p:sp>
       <p:pic>
         <p:nvPicPr>
-          <p:cNvPr id="10" name="Picture 9" descr="pres_05_pred_vs_actual.png"/>
+          <p:cNvPr id="10" name="Picture 9" descr="corr_05_pca_variance.png"/>
           <p:cNvPicPr>
             <a:picLocks noChangeAspect="1"/>
           </p:cNvPicPr>
@@ -9899,24 +12654,48 @@
         </p:blipFill>
         <p:spPr>
           <a:xfrm>
-            <a:off x="365760" y="1828800"/>
-            <a:ext cx="5943600" cy="5448300"/>
+            <a:off x="365760" y="1737360"/>
+            <a:ext cx="5852160" cy="3291840"/>
           </a:xfrm>
           <a:prstGeom prst="rect">
             <a:avLst/>
           </a:prstGeom>
         </p:spPr>
       </p:pic>
-      <p:sp>
-        <p:nvSpPr>
-          <p:cNvPr id="11" name="TextBox 10"/>
+      <p:pic>
+        <p:nvPicPr>
+          <p:cNvPr id="11" name="Picture 10" descr="corr_06_pca_loadings.png"/>
+          <p:cNvPicPr>
+            <a:picLocks noChangeAspect="1"/>
+          </p:cNvPicPr>
+          <p:nvPr/>
+        </p:nvPicPr>
+        <p:blipFill>
+          <a:blip r:embed="rId3"/>
+          <a:stretch>
+            <a:fillRect/>
+          </a:stretch>
+        </p:blipFill>
+        <p:spPr>
+          <a:xfrm>
+            <a:off x="6355080" y="1737360"/>
+            <a:ext cx="5669280" cy="2563501"/>
+          </a:xfrm>
+          <a:prstGeom prst="rect">
+            <a:avLst/>
+          </a:prstGeom>
+        </p:spPr>
+      </p:pic>
+      <p:sp>
+        <p:nvSpPr>
+          <p:cNvPr id="12" name="TextBox 11"/>
           <p:cNvSpPr txBox="1"/>
           <p:nvPr/>
         </p:nvSpPr>
         <p:spPr>
           <a:xfrm>
-            <a:off x="6858000" y="1828800"/>
-            <a:ext cx="5029200" cy="365760"/>
+            <a:off x="365760" y="5669280"/>
+            <a:ext cx="11430000" cy="365760"/>
           </a:xfrm>
           <a:prstGeom prst="rect">
             <a:avLst/>
@@ -9931,59 +12710,15 @@
           <a:p>
             <a:pPr algn="l"/>
             <a:r>
-              <a:rPr sz="1500" b="1">
+              <a:rPr sz="1400" b="1">
                 <a:solidFill>
                   <a:srgbClr val="003B71"/>
                 </a:solidFill>
                 <a:latin typeface="Yu Gothic"/>
                 <a:ea typeface="Yu Gothic"/>
               </a:rPr>
-              <a:t>■ 3アーキテクチャの精度比較</a:t>
-            </a:r>
-          </a:p>
-        </p:txBody>
-      </p:sp>
-      <p:sp>
-        <p:nvSpPr>
-          <p:cNvPr id="12" name="Rectangle 11"/>
-          <p:cNvSpPr/>
-          <p:nvPr/>
-        </p:nvSpPr>
-        <p:spPr>
-          <a:xfrm>
-            <a:off x="6858000" y="2286000"/>
-            <a:ext cx="2011680" cy="411480"/>
-          </a:xfrm>
-          <a:prstGeom prst="rect">
-            <a:avLst/>
-          </a:prstGeom>
-          <a:solidFill>
-            <a:srgbClr val="003B71"/>
-          </a:solidFill>
-          <a:ln>
-            <a:noFill/>
-          </a:ln>
-          <a:effectLst/>
-        </p:spPr>
-        <p:style>
-          <a:lnRef idx="1">
-            <a:schemeClr val="accent1"/>
-          </a:lnRef>
-          <a:fillRef idx="3">
-            <a:schemeClr val="accent1"/>
-          </a:fillRef>
-          <a:effectRef idx="2">
-            <a:schemeClr val="accent1"/>
-          </a:effectRef>
-          <a:fontRef idx="minor">
-            <a:schemeClr val="lt1"/>
-          </a:fontRef>
-        </p:style>
-        <p:txBody>
-          <a:bodyPr rtlCol="0" anchor="ctr"/>
-          <a:lstStyle/>
-          <a:p>
-            <a:pPr algn="ctr"/>
+              <a:t>■ 解釈: 3つの主成分で気象変動の 76% を説明</a:t>
+            </a:r>
           </a:p>
         </p:txBody>
       </p:sp>
@@ -9995,1244 +12730,8 @@
         </p:nvSpPr>
         <p:spPr>
           <a:xfrm>
-            <a:off x="6903720" y="2322576"/>
-            <a:ext cx="1920240" cy="338328"/>
-          </a:xfrm>
-          <a:prstGeom prst="rect">
-            <a:avLst/>
-          </a:prstGeom>
-          <a:noFill/>
-        </p:spPr>
-        <p:txBody>
-          <a:bodyPr wrap="square" anchor="ctr" lIns="0" rIns="0" tIns="0" bIns="0">
-            <a:spAutoFit/>
-          </a:bodyPr>
-          <a:lstStyle/>
-          <a:p>
-            <a:pPr algn="l"/>
-            <a:r>
-              <a:rPr sz="1200" b="1">
-                <a:solidFill>
-                  <a:srgbClr val="FFFFFF"/>
-                </a:solidFill>
-                <a:latin typeface="Yu Gothic"/>
-                <a:ea typeface="Yu Gothic"/>
-              </a:rPr>
-              <a:t>手法</a:t>
-            </a:r>
-          </a:p>
-        </p:txBody>
-      </p:sp>
-      <p:sp>
-        <p:nvSpPr>
-          <p:cNvPr id="14" name="Rectangle 13"/>
-          <p:cNvSpPr/>
-          <p:nvPr/>
-        </p:nvSpPr>
-        <p:spPr>
-          <a:xfrm>
-            <a:off x="8869680" y="2286000"/>
-            <a:ext cx="1005840" cy="411480"/>
-          </a:xfrm>
-          <a:prstGeom prst="rect">
-            <a:avLst/>
-          </a:prstGeom>
-          <a:solidFill>
-            <a:srgbClr val="003B71"/>
-          </a:solidFill>
-          <a:ln>
-            <a:noFill/>
-          </a:ln>
-          <a:effectLst/>
-        </p:spPr>
-        <p:style>
-          <a:lnRef idx="1">
-            <a:schemeClr val="accent1"/>
-          </a:lnRef>
-          <a:fillRef idx="3">
-            <a:schemeClr val="accent1"/>
-          </a:fillRef>
-          <a:effectRef idx="2">
-            <a:schemeClr val="accent1"/>
-          </a:effectRef>
-          <a:fontRef idx="minor">
-            <a:schemeClr val="lt1"/>
-          </a:fontRef>
-        </p:style>
-        <p:txBody>
-          <a:bodyPr rtlCol="0" anchor="ctr"/>
-          <a:lstStyle/>
-          <a:p>
-            <a:pPr algn="ctr"/>
-          </a:p>
-        </p:txBody>
-      </p:sp>
-      <p:sp>
-        <p:nvSpPr>
-          <p:cNvPr id="15" name="TextBox 14"/>
-          <p:cNvSpPr txBox="1"/>
-          <p:nvPr/>
-        </p:nvSpPr>
-        <p:spPr>
-          <a:xfrm>
-            <a:off x="8915400" y="2322576"/>
-            <a:ext cx="914400" cy="338328"/>
-          </a:xfrm>
-          <a:prstGeom prst="rect">
-            <a:avLst/>
-          </a:prstGeom>
-          <a:noFill/>
-        </p:spPr>
-        <p:txBody>
-          <a:bodyPr wrap="square" anchor="ctr" lIns="0" rIns="0" tIns="0" bIns="0">
-            <a:spAutoFit/>
-          </a:bodyPr>
-          <a:lstStyle/>
-          <a:p>
-            <a:pPr algn="l"/>
-            <a:r>
-              <a:rPr sz="1200" b="1">
-                <a:solidFill>
-                  <a:srgbClr val="FFFFFF"/>
-                </a:solidFill>
-                <a:latin typeface="Yu Gothic"/>
-                <a:ea typeface="Yu Gothic"/>
-              </a:rPr>
-              <a:t>MAE(kW)</a:t>
-            </a:r>
-          </a:p>
-        </p:txBody>
-      </p:sp>
-      <p:sp>
-        <p:nvSpPr>
-          <p:cNvPr id="16" name="Rectangle 15"/>
-          <p:cNvSpPr/>
-          <p:nvPr/>
-        </p:nvSpPr>
-        <p:spPr>
-          <a:xfrm>
-            <a:off x="9875520" y="2286000"/>
-            <a:ext cx="914400" cy="411480"/>
-          </a:xfrm>
-          <a:prstGeom prst="rect">
-            <a:avLst/>
-          </a:prstGeom>
-          <a:solidFill>
-            <a:srgbClr val="003B71"/>
-          </a:solidFill>
-          <a:ln>
-            <a:noFill/>
-          </a:ln>
-          <a:effectLst/>
-        </p:spPr>
-        <p:style>
-          <a:lnRef idx="1">
-            <a:schemeClr val="accent1"/>
-          </a:lnRef>
-          <a:fillRef idx="3">
-            <a:schemeClr val="accent1"/>
-          </a:fillRef>
-          <a:effectRef idx="2">
-            <a:schemeClr val="accent1"/>
-          </a:effectRef>
-          <a:fontRef idx="minor">
-            <a:schemeClr val="lt1"/>
-          </a:fontRef>
-        </p:style>
-        <p:txBody>
-          <a:bodyPr rtlCol="0" anchor="ctr"/>
-          <a:lstStyle/>
-          <a:p>
-            <a:pPr algn="ctr"/>
-          </a:p>
-        </p:txBody>
-      </p:sp>
-      <p:sp>
-        <p:nvSpPr>
-          <p:cNvPr id="17" name="TextBox 16"/>
-          <p:cNvSpPr txBox="1"/>
-          <p:nvPr/>
-        </p:nvSpPr>
-        <p:spPr>
-          <a:xfrm>
-            <a:off x="9921240" y="2322576"/>
-            <a:ext cx="822960" cy="338328"/>
-          </a:xfrm>
-          <a:prstGeom prst="rect">
-            <a:avLst/>
-          </a:prstGeom>
-          <a:noFill/>
-        </p:spPr>
-        <p:txBody>
-          <a:bodyPr wrap="square" anchor="ctr" lIns="0" rIns="0" tIns="0" bIns="0">
-            <a:spAutoFit/>
-          </a:bodyPr>
-          <a:lstStyle/>
-          <a:p>
-            <a:pPr algn="l"/>
-            <a:r>
-              <a:rPr sz="1200" b="1">
-                <a:solidFill>
-                  <a:srgbClr val="FFFFFF"/>
-                </a:solidFill>
-                <a:latin typeface="Yu Gothic"/>
-                <a:ea typeface="Yu Gothic"/>
-              </a:rPr>
-              <a:t>R²</a:t>
-            </a:r>
-          </a:p>
-        </p:txBody>
-      </p:sp>
-      <p:sp>
-        <p:nvSpPr>
-          <p:cNvPr id="18" name="Rectangle 17"/>
-          <p:cNvSpPr/>
-          <p:nvPr/>
-        </p:nvSpPr>
-        <p:spPr>
-          <a:xfrm>
-            <a:off x="10789920" y="2286000"/>
-            <a:ext cx="914400" cy="411480"/>
-          </a:xfrm>
-          <a:prstGeom prst="rect">
-            <a:avLst/>
-          </a:prstGeom>
-          <a:solidFill>
-            <a:srgbClr val="003B71"/>
-          </a:solidFill>
-          <a:ln>
-            <a:noFill/>
-          </a:ln>
-          <a:effectLst/>
-        </p:spPr>
-        <p:style>
-          <a:lnRef idx="1">
-            <a:schemeClr val="accent1"/>
-          </a:lnRef>
-          <a:fillRef idx="3">
-            <a:schemeClr val="accent1"/>
-          </a:fillRef>
-          <a:effectRef idx="2">
-            <a:schemeClr val="accent1"/>
-          </a:effectRef>
-          <a:fontRef idx="minor">
-            <a:schemeClr val="lt1"/>
-          </a:fontRef>
-        </p:style>
-        <p:txBody>
-          <a:bodyPr rtlCol="0" anchor="ctr"/>
-          <a:lstStyle/>
-          <a:p>
-            <a:pPr algn="ctr"/>
-          </a:p>
-        </p:txBody>
-      </p:sp>
-      <p:sp>
-        <p:nvSpPr>
-          <p:cNvPr id="19" name="TextBox 18"/>
-          <p:cNvSpPr txBox="1"/>
-          <p:nvPr/>
-        </p:nvSpPr>
-        <p:spPr>
-          <a:xfrm>
-            <a:off x="10835640" y="2322576"/>
-            <a:ext cx="822960" cy="338328"/>
-          </a:xfrm>
-          <a:prstGeom prst="rect">
-            <a:avLst/>
-          </a:prstGeom>
-          <a:noFill/>
-        </p:spPr>
-        <p:txBody>
-          <a:bodyPr wrap="square" anchor="ctr" lIns="0" rIns="0" tIns="0" bIns="0">
-            <a:spAutoFit/>
-          </a:bodyPr>
-          <a:lstStyle/>
-          <a:p>
-            <a:pPr algn="l"/>
-            <a:r>
-              <a:rPr sz="1200" b="1">
-                <a:solidFill>
-                  <a:srgbClr val="FFFFFF"/>
-                </a:solidFill>
-                <a:latin typeface="Yu Gothic"/>
-                <a:ea typeface="Yu Gothic"/>
-              </a:rPr>
-              <a:t>MAPE(%)</a:t>
-            </a:r>
-          </a:p>
-        </p:txBody>
-      </p:sp>
-      <p:sp>
-        <p:nvSpPr>
-          <p:cNvPr id="20" name="Rectangle 19"/>
-          <p:cNvSpPr/>
-          <p:nvPr/>
-        </p:nvSpPr>
-        <p:spPr>
-          <a:xfrm>
-            <a:off x="6858000" y="2697480"/>
-            <a:ext cx="2011680" cy="411480"/>
-          </a:xfrm>
-          <a:prstGeom prst="rect">
-            <a:avLst/>
-          </a:prstGeom>
-          <a:solidFill>
-            <a:srgbClr val="F4F6FA"/>
-          </a:solidFill>
-          <a:ln>
-            <a:noFill/>
-          </a:ln>
-          <a:effectLst/>
-        </p:spPr>
-        <p:style>
-          <a:lnRef idx="1">
-            <a:schemeClr val="accent1"/>
-          </a:lnRef>
-          <a:fillRef idx="3">
-            <a:schemeClr val="accent1"/>
-          </a:fillRef>
-          <a:effectRef idx="2">
-            <a:schemeClr val="accent1"/>
-          </a:effectRef>
-          <a:fontRef idx="minor">
-            <a:schemeClr val="lt1"/>
-          </a:fontRef>
-        </p:style>
-        <p:txBody>
-          <a:bodyPr rtlCol="0" anchor="ctr"/>
-          <a:lstStyle/>
-          <a:p>
-            <a:pPr algn="ctr"/>
-          </a:p>
-        </p:txBody>
-      </p:sp>
-      <p:sp>
-        <p:nvSpPr>
-          <p:cNvPr id="21" name="TextBox 20"/>
-          <p:cNvSpPr txBox="1"/>
-          <p:nvPr/>
-        </p:nvSpPr>
-        <p:spPr>
-          <a:xfrm>
-            <a:off x="6903720" y="2734056"/>
-            <a:ext cx="1920240" cy="338328"/>
-          </a:xfrm>
-          <a:prstGeom prst="rect">
-            <a:avLst/>
-          </a:prstGeom>
-          <a:noFill/>
-        </p:spPr>
-        <p:txBody>
-          <a:bodyPr wrap="square" anchor="ctr" lIns="0" rIns="0" tIns="0" bIns="0">
-            <a:spAutoFit/>
-          </a:bodyPr>
-          <a:lstStyle/>
-          <a:p>
-            <a:pPr algn="l"/>
-            <a:r>
-              <a:rPr sz="1200" b="0">
-                <a:solidFill>
-                  <a:srgbClr val="5A5A5A"/>
-                </a:solidFill>
-                <a:latin typeface="Yu Gothic"/>
-                <a:ea typeface="Yu Gothic"/>
-              </a:rPr>
-              <a:t>A: 観測のみ (上限)</a:t>
-            </a:r>
-          </a:p>
-        </p:txBody>
-      </p:sp>
-      <p:sp>
-        <p:nvSpPr>
-          <p:cNvPr id="22" name="Rectangle 21"/>
-          <p:cNvSpPr/>
-          <p:nvPr/>
-        </p:nvSpPr>
-        <p:spPr>
-          <a:xfrm>
-            <a:off x="8869680" y="2697480"/>
-            <a:ext cx="1005840" cy="411480"/>
-          </a:xfrm>
-          <a:prstGeom prst="rect">
-            <a:avLst/>
-          </a:prstGeom>
-          <a:solidFill>
-            <a:srgbClr val="F4F6FA"/>
-          </a:solidFill>
-          <a:ln>
-            <a:noFill/>
-          </a:ln>
-          <a:effectLst/>
-        </p:spPr>
-        <p:style>
-          <a:lnRef idx="1">
-            <a:schemeClr val="accent1"/>
-          </a:lnRef>
-          <a:fillRef idx="3">
-            <a:schemeClr val="accent1"/>
-          </a:fillRef>
-          <a:effectRef idx="2">
-            <a:schemeClr val="accent1"/>
-          </a:effectRef>
-          <a:fontRef idx="minor">
-            <a:schemeClr val="lt1"/>
-          </a:fontRef>
-        </p:style>
-        <p:txBody>
-          <a:bodyPr rtlCol="0" anchor="ctr"/>
-          <a:lstStyle/>
-          <a:p>
-            <a:pPr algn="ctr"/>
-          </a:p>
-        </p:txBody>
-      </p:sp>
-      <p:sp>
-        <p:nvSpPr>
-          <p:cNvPr id="23" name="TextBox 22"/>
-          <p:cNvSpPr txBox="1"/>
-          <p:nvPr/>
-        </p:nvSpPr>
-        <p:spPr>
-          <a:xfrm>
-            <a:off x="8915400" y="2734056"/>
-            <a:ext cx="914400" cy="338328"/>
-          </a:xfrm>
-          <a:prstGeom prst="rect">
-            <a:avLst/>
-          </a:prstGeom>
-          <a:noFill/>
-        </p:spPr>
-        <p:txBody>
-          <a:bodyPr wrap="square" anchor="ctr" lIns="0" rIns="0" tIns="0" bIns="0">
-            <a:spAutoFit/>
-          </a:bodyPr>
-          <a:lstStyle/>
-          <a:p>
-            <a:pPr algn="l"/>
-            <a:r>
-              <a:rPr sz="1200" b="0">
-                <a:solidFill>
-                  <a:srgbClr val="5A5A5A"/>
-                </a:solidFill>
-                <a:latin typeface="Yu Gothic"/>
-                <a:ea typeface="Yu Gothic"/>
-              </a:rPr>
-              <a:t>50.7</a:t>
-            </a:r>
-          </a:p>
-        </p:txBody>
-      </p:sp>
-      <p:sp>
-        <p:nvSpPr>
-          <p:cNvPr id="24" name="Rectangle 23"/>
-          <p:cNvSpPr/>
-          <p:nvPr/>
-        </p:nvSpPr>
-        <p:spPr>
-          <a:xfrm>
-            <a:off x="9875520" y="2697480"/>
-            <a:ext cx="914400" cy="411480"/>
-          </a:xfrm>
-          <a:prstGeom prst="rect">
-            <a:avLst/>
-          </a:prstGeom>
-          <a:solidFill>
-            <a:srgbClr val="F4F6FA"/>
-          </a:solidFill>
-          <a:ln>
-            <a:noFill/>
-          </a:ln>
-          <a:effectLst/>
-        </p:spPr>
-        <p:style>
-          <a:lnRef idx="1">
-            <a:schemeClr val="accent1"/>
-          </a:lnRef>
-          <a:fillRef idx="3">
-            <a:schemeClr val="accent1"/>
-          </a:fillRef>
-          <a:effectRef idx="2">
-            <a:schemeClr val="accent1"/>
-          </a:effectRef>
-          <a:fontRef idx="minor">
-            <a:schemeClr val="lt1"/>
-          </a:fontRef>
-        </p:style>
-        <p:txBody>
-          <a:bodyPr rtlCol="0" anchor="ctr"/>
-          <a:lstStyle/>
-          <a:p>
-            <a:pPr algn="ctr"/>
-          </a:p>
-        </p:txBody>
-      </p:sp>
-      <p:sp>
-        <p:nvSpPr>
-          <p:cNvPr id="25" name="TextBox 24"/>
-          <p:cNvSpPr txBox="1"/>
-          <p:nvPr/>
-        </p:nvSpPr>
-        <p:spPr>
-          <a:xfrm>
-            <a:off x="9921240" y="2734056"/>
-            <a:ext cx="822960" cy="338328"/>
-          </a:xfrm>
-          <a:prstGeom prst="rect">
-            <a:avLst/>
-          </a:prstGeom>
-          <a:noFill/>
-        </p:spPr>
-        <p:txBody>
-          <a:bodyPr wrap="square" anchor="ctr" lIns="0" rIns="0" tIns="0" bIns="0">
-            <a:spAutoFit/>
-          </a:bodyPr>
-          <a:lstStyle/>
-          <a:p>
-            <a:pPr algn="l"/>
-            <a:r>
-              <a:rPr sz="1200" b="0">
-                <a:solidFill>
-                  <a:srgbClr val="5A5A5A"/>
-                </a:solidFill>
-                <a:latin typeface="Yu Gothic"/>
-                <a:ea typeface="Yu Gothic"/>
-              </a:rPr>
-              <a:t>0.915</a:t>
-            </a:r>
-          </a:p>
-        </p:txBody>
-      </p:sp>
-      <p:sp>
-        <p:nvSpPr>
-          <p:cNvPr id="26" name="Rectangle 25"/>
-          <p:cNvSpPr/>
-          <p:nvPr/>
-        </p:nvSpPr>
-        <p:spPr>
-          <a:xfrm>
-            <a:off x="10789920" y="2697480"/>
-            <a:ext cx="914400" cy="411480"/>
-          </a:xfrm>
-          <a:prstGeom prst="rect">
-            <a:avLst/>
-          </a:prstGeom>
-          <a:solidFill>
-            <a:srgbClr val="F4F6FA"/>
-          </a:solidFill>
-          <a:ln>
-            <a:noFill/>
-          </a:ln>
-          <a:effectLst/>
-        </p:spPr>
-        <p:style>
-          <a:lnRef idx="1">
-            <a:schemeClr val="accent1"/>
-          </a:lnRef>
-          <a:fillRef idx="3">
-            <a:schemeClr val="accent1"/>
-          </a:fillRef>
-          <a:effectRef idx="2">
-            <a:schemeClr val="accent1"/>
-          </a:effectRef>
-          <a:fontRef idx="minor">
-            <a:schemeClr val="lt1"/>
-          </a:fontRef>
-        </p:style>
-        <p:txBody>
-          <a:bodyPr rtlCol="0" anchor="ctr"/>
-          <a:lstStyle/>
-          <a:p>
-            <a:pPr algn="ctr"/>
-          </a:p>
-        </p:txBody>
-      </p:sp>
-      <p:sp>
-        <p:nvSpPr>
-          <p:cNvPr id="27" name="TextBox 26"/>
-          <p:cNvSpPr txBox="1"/>
-          <p:nvPr/>
-        </p:nvSpPr>
-        <p:spPr>
-          <a:xfrm>
-            <a:off x="10835640" y="2734056"/>
-            <a:ext cx="822960" cy="338328"/>
-          </a:xfrm>
-          <a:prstGeom prst="rect">
-            <a:avLst/>
-          </a:prstGeom>
-          <a:noFill/>
-        </p:spPr>
-        <p:txBody>
-          <a:bodyPr wrap="square" anchor="ctr" lIns="0" rIns="0" tIns="0" bIns="0">
-            <a:spAutoFit/>
-          </a:bodyPr>
-          <a:lstStyle/>
-          <a:p>
-            <a:pPr algn="l"/>
-            <a:r>
-              <a:rPr sz="1200" b="0">
-                <a:solidFill>
-                  <a:srgbClr val="5A5A5A"/>
-                </a:solidFill>
-                <a:latin typeface="Yu Gothic"/>
-                <a:ea typeface="Yu Gothic"/>
-              </a:rPr>
-              <a:t>6.96</a:t>
-            </a:r>
-          </a:p>
-        </p:txBody>
-      </p:sp>
-      <p:sp>
-        <p:nvSpPr>
-          <p:cNvPr id="28" name="Rectangle 27"/>
-          <p:cNvSpPr/>
-          <p:nvPr/>
-        </p:nvSpPr>
-        <p:spPr>
-          <a:xfrm>
-            <a:off x="6858000" y="3108960"/>
-            <a:ext cx="2011680" cy="411480"/>
-          </a:xfrm>
-          <a:prstGeom prst="rect">
-            <a:avLst/>
-          </a:prstGeom>
-          <a:solidFill>
-            <a:srgbClr val="FFFFFF"/>
-          </a:solidFill>
-          <a:ln>
-            <a:noFill/>
-          </a:ln>
-          <a:effectLst/>
-        </p:spPr>
-        <p:style>
-          <a:lnRef idx="1">
-            <a:schemeClr val="accent1"/>
-          </a:lnRef>
-          <a:fillRef idx="3">
-            <a:schemeClr val="accent1"/>
-          </a:fillRef>
-          <a:effectRef idx="2">
-            <a:schemeClr val="accent1"/>
-          </a:effectRef>
-          <a:fontRef idx="minor">
-            <a:schemeClr val="lt1"/>
-          </a:fontRef>
-        </p:style>
-        <p:txBody>
-          <a:bodyPr rtlCol="0" anchor="ctr"/>
-          <a:lstStyle/>
-          <a:p>
-            <a:pPr algn="ctr"/>
-          </a:p>
-        </p:txBody>
-      </p:sp>
-      <p:sp>
-        <p:nvSpPr>
-          <p:cNvPr id="29" name="TextBox 28"/>
-          <p:cNvSpPr txBox="1"/>
-          <p:nvPr/>
-        </p:nvSpPr>
-        <p:spPr>
-          <a:xfrm>
-            <a:off x="6903720" y="3145536"/>
-            <a:ext cx="1920240" cy="338328"/>
-          </a:xfrm>
-          <a:prstGeom prst="rect">
-            <a:avLst/>
-          </a:prstGeom>
-          <a:noFill/>
-        </p:spPr>
-        <p:txBody>
-          <a:bodyPr wrap="square" anchor="ctr" lIns="0" rIns="0" tIns="0" bIns="0">
-            <a:spAutoFit/>
-          </a:bodyPr>
-          <a:lstStyle/>
-          <a:p>
-            <a:pPr algn="l"/>
-            <a:r>
-              <a:rPr sz="1200" b="0">
-                <a:solidFill>
-                  <a:srgbClr val="5A5A5A"/>
-                </a:solidFill>
-                <a:latin typeface="Yu Gothic"/>
-                <a:ea typeface="Yu Gothic"/>
-              </a:rPr>
-              <a:t>B: 予報のみ</a:t>
-            </a:r>
-          </a:p>
-        </p:txBody>
-      </p:sp>
-      <p:sp>
-        <p:nvSpPr>
-          <p:cNvPr id="30" name="Rectangle 29"/>
-          <p:cNvSpPr/>
-          <p:nvPr/>
-        </p:nvSpPr>
-        <p:spPr>
-          <a:xfrm>
-            <a:off x="8869680" y="3108960"/>
-            <a:ext cx="1005840" cy="411480"/>
-          </a:xfrm>
-          <a:prstGeom prst="rect">
-            <a:avLst/>
-          </a:prstGeom>
-          <a:solidFill>
-            <a:srgbClr val="FFFFFF"/>
-          </a:solidFill>
-          <a:ln>
-            <a:noFill/>
-          </a:ln>
-          <a:effectLst/>
-        </p:spPr>
-        <p:style>
-          <a:lnRef idx="1">
-            <a:schemeClr val="accent1"/>
-          </a:lnRef>
-          <a:fillRef idx="3">
-            <a:schemeClr val="accent1"/>
-          </a:fillRef>
-          <a:effectRef idx="2">
-            <a:schemeClr val="accent1"/>
-          </a:effectRef>
-          <a:fontRef idx="minor">
-            <a:schemeClr val="lt1"/>
-          </a:fontRef>
-        </p:style>
-        <p:txBody>
-          <a:bodyPr rtlCol="0" anchor="ctr"/>
-          <a:lstStyle/>
-          <a:p>
-            <a:pPr algn="ctr"/>
-          </a:p>
-        </p:txBody>
-      </p:sp>
-      <p:sp>
-        <p:nvSpPr>
-          <p:cNvPr id="31" name="TextBox 30"/>
-          <p:cNvSpPr txBox="1"/>
-          <p:nvPr/>
-        </p:nvSpPr>
-        <p:spPr>
-          <a:xfrm>
-            <a:off x="8915400" y="3145536"/>
-            <a:ext cx="914400" cy="338328"/>
-          </a:xfrm>
-          <a:prstGeom prst="rect">
-            <a:avLst/>
-          </a:prstGeom>
-          <a:noFill/>
-        </p:spPr>
-        <p:txBody>
-          <a:bodyPr wrap="square" anchor="ctr" lIns="0" rIns="0" tIns="0" bIns="0">
-            <a:spAutoFit/>
-          </a:bodyPr>
-          <a:lstStyle/>
-          <a:p>
-            <a:pPr algn="l"/>
-            <a:r>
-              <a:rPr sz="1200" b="0">
-                <a:solidFill>
-                  <a:srgbClr val="5A5A5A"/>
-                </a:solidFill>
-                <a:latin typeface="Yu Gothic"/>
-                <a:ea typeface="Yu Gothic"/>
-              </a:rPr>
-              <a:t>59.7</a:t>
-            </a:r>
-          </a:p>
-        </p:txBody>
-      </p:sp>
-      <p:sp>
-        <p:nvSpPr>
-          <p:cNvPr id="32" name="Rectangle 31"/>
-          <p:cNvSpPr/>
-          <p:nvPr/>
-        </p:nvSpPr>
-        <p:spPr>
-          <a:xfrm>
-            <a:off x="9875520" y="3108960"/>
-            <a:ext cx="914400" cy="411480"/>
-          </a:xfrm>
-          <a:prstGeom prst="rect">
-            <a:avLst/>
-          </a:prstGeom>
-          <a:solidFill>
-            <a:srgbClr val="FFFFFF"/>
-          </a:solidFill>
-          <a:ln>
-            <a:noFill/>
-          </a:ln>
-          <a:effectLst/>
-        </p:spPr>
-        <p:style>
-          <a:lnRef idx="1">
-            <a:schemeClr val="accent1"/>
-          </a:lnRef>
-          <a:fillRef idx="3">
-            <a:schemeClr val="accent1"/>
-          </a:fillRef>
-          <a:effectRef idx="2">
-            <a:schemeClr val="accent1"/>
-          </a:effectRef>
-          <a:fontRef idx="minor">
-            <a:schemeClr val="lt1"/>
-          </a:fontRef>
-        </p:style>
-        <p:txBody>
-          <a:bodyPr rtlCol="0" anchor="ctr"/>
-          <a:lstStyle/>
-          <a:p>
-            <a:pPr algn="ctr"/>
-          </a:p>
-        </p:txBody>
-      </p:sp>
-      <p:sp>
-        <p:nvSpPr>
-          <p:cNvPr id="33" name="TextBox 32"/>
-          <p:cNvSpPr txBox="1"/>
-          <p:nvPr/>
-        </p:nvSpPr>
-        <p:spPr>
-          <a:xfrm>
-            <a:off x="9921240" y="3145536"/>
-            <a:ext cx="822960" cy="338328"/>
-          </a:xfrm>
-          <a:prstGeom prst="rect">
-            <a:avLst/>
-          </a:prstGeom>
-          <a:noFill/>
-        </p:spPr>
-        <p:txBody>
-          <a:bodyPr wrap="square" anchor="ctr" lIns="0" rIns="0" tIns="0" bIns="0">
-            <a:spAutoFit/>
-          </a:bodyPr>
-          <a:lstStyle/>
-          <a:p>
-            <a:pPr algn="l"/>
-            <a:r>
-              <a:rPr sz="1200" b="0">
-                <a:solidFill>
-                  <a:srgbClr val="5A5A5A"/>
-                </a:solidFill>
-                <a:latin typeface="Yu Gothic"/>
-                <a:ea typeface="Yu Gothic"/>
-              </a:rPr>
-              <a:t>0.883</a:t>
-            </a:r>
-          </a:p>
-        </p:txBody>
-      </p:sp>
-      <p:sp>
-        <p:nvSpPr>
-          <p:cNvPr id="34" name="Rectangle 33"/>
-          <p:cNvSpPr/>
-          <p:nvPr/>
-        </p:nvSpPr>
-        <p:spPr>
-          <a:xfrm>
-            <a:off x="10789920" y="3108960"/>
-            <a:ext cx="914400" cy="411480"/>
-          </a:xfrm>
-          <a:prstGeom prst="rect">
-            <a:avLst/>
-          </a:prstGeom>
-          <a:solidFill>
-            <a:srgbClr val="FFFFFF"/>
-          </a:solidFill>
-          <a:ln>
-            <a:noFill/>
-          </a:ln>
-          <a:effectLst/>
-        </p:spPr>
-        <p:style>
-          <a:lnRef idx="1">
-            <a:schemeClr val="accent1"/>
-          </a:lnRef>
-          <a:fillRef idx="3">
-            <a:schemeClr val="accent1"/>
-          </a:fillRef>
-          <a:effectRef idx="2">
-            <a:schemeClr val="accent1"/>
-          </a:effectRef>
-          <a:fontRef idx="minor">
-            <a:schemeClr val="lt1"/>
-          </a:fontRef>
-        </p:style>
-        <p:txBody>
-          <a:bodyPr rtlCol="0" anchor="ctr"/>
-          <a:lstStyle/>
-          <a:p>
-            <a:pPr algn="ctr"/>
-          </a:p>
-        </p:txBody>
-      </p:sp>
-      <p:sp>
-        <p:nvSpPr>
-          <p:cNvPr id="35" name="TextBox 34"/>
-          <p:cNvSpPr txBox="1"/>
-          <p:nvPr/>
-        </p:nvSpPr>
-        <p:spPr>
-          <a:xfrm>
-            <a:off x="10835640" y="3145536"/>
-            <a:ext cx="822960" cy="338328"/>
-          </a:xfrm>
-          <a:prstGeom prst="rect">
-            <a:avLst/>
-          </a:prstGeom>
-          <a:noFill/>
-        </p:spPr>
-        <p:txBody>
-          <a:bodyPr wrap="square" anchor="ctr" lIns="0" rIns="0" tIns="0" bIns="0">
-            <a:spAutoFit/>
-          </a:bodyPr>
-          <a:lstStyle/>
-          <a:p>
-            <a:pPr algn="l"/>
-            <a:r>
-              <a:rPr sz="1200" b="0">
-                <a:solidFill>
-                  <a:srgbClr val="5A5A5A"/>
-                </a:solidFill>
-                <a:latin typeface="Yu Gothic"/>
-                <a:ea typeface="Yu Gothic"/>
-              </a:rPr>
-              <a:t>7.93</a:t>
-            </a:r>
-          </a:p>
-        </p:txBody>
-      </p:sp>
-      <p:sp>
-        <p:nvSpPr>
-          <p:cNvPr id="36" name="Rectangle 35"/>
-          <p:cNvSpPr/>
-          <p:nvPr/>
-        </p:nvSpPr>
-        <p:spPr>
-          <a:xfrm>
-            <a:off x="6858000" y="3520440"/>
-            <a:ext cx="2011680" cy="411480"/>
-          </a:xfrm>
-          <a:prstGeom prst="rect">
-            <a:avLst/>
-          </a:prstGeom>
-          <a:solidFill>
-            <a:srgbClr val="FDE9CE"/>
-          </a:solidFill>
-          <a:ln>
-            <a:noFill/>
-          </a:ln>
-          <a:effectLst/>
-        </p:spPr>
-        <p:style>
-          <a:lnRef idx="1">
-            <a:schemeClr val="accent1"/>
-          </a:lnRef>
-          <a:fillRef idx="3">
-            <a:schemeClr val="accent1"/>
-          </a:fillRef>
-          <a:effectRef idx="2">
-            <a:schemeClr val="accent1"/>
-          </a:effectRef>
-          <a:fontRef idx="minor">
-            <a:schemeClr val="lt1"/>
-          </a:fontRef>
-        </p:style>
-        <p:txBody>
-          <a:bodyPr rtlCol="0" anchor="ctr"/>
-          <a:lstStyle/>
-          <a:p>
-            <a:pPr algn="ctr"/>
-          </a:p>
-        </p:txBody>
-      </p:sp>
-      <p:sp>
-        <p:nvSpPr>
-          <p:cNvPr id="37" name="TextBox 36"/>
-          <p:cNvSpPr txBox="1"/>
-          <p:nvPr/>
-        </p:nvSpPr>
-        <p:spPr>
-          <a:xfrm>
-            <a:off x="6903720" y="3557016"/>
-            <a:ext cx="1920240" cy="338328"/>
-          </a:xfrm>
-          <a:prstGeom prst="rect">
-            <a:avLst/>
-          </a:prstGeom>
-          <a:noFill/>
-        </p:spPr>
-        <p:txBody>
-          <a:bodyPr wrap="square" anchor="ctr" lIns="0" rIns="0" tIns="0" bIns="0">
-            <a:spAutoFit/>
-          </a:bodyPr>
-          <a:lstStyle/>
-          <a:p>
-            <a:pPr algn="l"/>
-            <a:r>
-              <a:rPr sz="1200" b="1">
-                <a:solidFill>
-                  <a:srgbClr val="C8102E"/>
-                </a:solidFill>
-                <a:latin typeface="Yu Gothic"/>
-                <a:ea typeface="Yu Gothic"/>
-              </a:rPr>
-              <a:t>C: Hybrid (本研究)</a:t>
-            </a:r>
-          </a:p>
-        </p:txBody>
-      </p:sp>
-      <p:sp>
-        <p:nvSpPr>
-          <p:cNvPr id="38" name="Rectangle 37"/>
-          <p:cNvSpPr/>
-          <p:nvPr/>
-        </p:nvSpPr>
-        <p:spPr>
-          <a:xfrm>
-            <a:off x="8869680" y="3520440"/>
-            <a:ext cx="1005840" cy="411480"/>
-          </a:xfrm>
-          <a:prstGeom prst="rect">
-            <a:avLst/>
-          </a:prstGeom>
-          <a:solidFill>
-            <a:srgbClr val="FDE9CE"/>
-          </a:solidFill>
-          <a:ln>
-            <a:noFill/>
-          </a:ln>
-          <a:effectLst/>
-        </p:spPr>
-        <p:style>
-          <a:lnRef idx="1">
-            <a:schemeClr val="accent1"/>
-          </a:lnRef>
-          <a:fillRef idx="3">
-            <a:schemeClr val="accent1"/>
-          </a:fillRef>
-          <a:effectRef idx="2">
-            <a:schemeClr val="accent1"/>
-          </a:effectRef>
-          <a:fontRef idx="minor">
-            <a:schemeClr val="lt1"/>
-          </a:fontRef>
-        </p:style>
-        <p:txBody>
-          <a:bodyPr rtlCol="0" anchor="ctr"/>
-          <a:lstStyle/>
-          <a:p>
-            <a:pPr algn="ctr"/>
-          </a:p>
-        </p:txBody>
-      </p:sp>
-      <p:sp>
-        <p:nvSpPr>
-          <p:cNvPr id="39" name="TextBox 38"/>
-          <p:cNvSpPr txBox="1"/>
-          <p:nvPr/>
-        </p:nvSpPr>
-        <p:spPr>
-          <a:xfrm>
-            <a:off x="8915400" y="3557016"/>
-            <a:ext cx="914400" cy="338328"/>
-          </a:xfrm>
-          <a:prstGeom prst="rect">
-            <a:avLst/>
-          </a:prstGeom>
-          <a:noFill/>
-        </p:spPr>
-        <p:txBody>
-          <a:bodyPr wrap="square" anchor="ctr" lIns="0" rIns="0" tIns="0" bIns="0">
-            <a:spAutoFit/>
-          </a:bodyPr>
-          <a:lstStyle/>
-          <a:p>
-            <a:pPr algn="l"/>
-            <a:r>
-              <a:rPr sz="1200" b="1">
-                <a:solidFill>
-                  <a:srgbClr val="C8102E"/>
-                </a:solidFill>
-                <a:latin typeface="Yu Gothic"/>
-                <a:ea typeface="Yu Gothic"/>
-              </a:rPr>
-              <a:t>54.0</a:t>
-            </a:r>
-          </a:p>
-        </p:txBody>
-      </p:sp>
-      <p:sp>
-        <p:nvSpPr>
-          <p:cNvPr id="40" name="Rectangle 39"/>
-          <p:cNvSpPr/>
-          <p:nvPr/>
-        </p:nvSpPr>
-        <p:spPr>
-          <a:xfrm>
-            <a:off x="9875520" y="3520440"/>
-            <a:ext cx="914400" cy="411480"/>
-          </a:xfrm>
-          <a:prstGeom prst="rect">
-            <a:avLst/>
-          </a:prstGeom>
-          <a:solidFill>
-            <a:srgbClr val="FDE9CE"/>
-          </a:solidFill>
-          <a:ln>
-            <a:noFill/>
-          </a:ln>
-          <a:effectLst/>
-        </p:spPr>
-        <p:style>
-          <a:lnRef idx="1">
-            <a:schemeClr val="accent1"/>
-          </a:lnRef>
-          <a:fillRef idx="3">
-            <a:schemeClr val="accent1"/>
-          </a:fillRef>
-          <a:effectRef idx="2">
-            <a:schemeClr val="accent1"/>
-          </a:effectRef>
-          <a:fontRef idx="minor">
-            <a:schemeClr val="lt1"/>
-          </a:fontRef>
-        </p:style>
-        <p:txBody>
-          <a:bodyPr rtlCol="0" anchor="ctr"/>
-          <a:lstStyle/>
-          <a:p>
-            <a:pPr algn="ctr"/>
-          </a:p>
-        </p:txBody>
-      </p:sp>
-      <p:sp>
-        <p:nvSpPr>
-          <p:cNvPr id="41" name="TextBox 40"/>
-          <p:cNvSpPr txBox="1"/>
-          <p:nvPr/>
-        </p:nvSpPr>
-        <p:spPr>
-          <a:xfrm>
-            <a:off x="9921240" y="3557016"/>
-            <a:ext cx="822960" cy="338328"/>
-          </a:xfrm>
-          <a:prstGeom prst="rect">
-            <a:avLst/>
-          </a:prstGeom>
-          <a:noFill/>
-        </p:spPr>
-        <p:txBody>
-          <a:bodyPr wrap="square" anchor="ctr" lIns="0" rIns="0" tIns="0" bIns="0">
-            <a:spAutoFit/>
-          </a:bodyPr>
-          <a:lstStyle/>
-          <a:p>
-            <a:pPr algn="l"/>
-            <a:r>
-              <a:rPr sz="1200" b="1">
-                <a:solidFill>
-                  <a:srgbClr val="C8102E"/>
-                </a:solidFill>
-                <a:latin typeface="Yu Gothic"/>
-                <a:ea typeface="Yu Gothic"/>
-              </a:rPr>
-              <a:t>0.905</a:t>
-            </a:r>
-          </a:p>
-        </p:txBody>
-      </p:sp>
-      <p:sp>
-        <p:nvSpPr>
-          <p:cNvPr id="42" name="Rectangle 41"/>
-          <p:cNvSpPr/>
-          <p:nvPr/>
-        </p:nvSpPr>
-        <p:spPr>
-          <a:xfrm>
-            <a:off x="10789920" y="3520440"/>
-            <a:ext cx="914400" cy="411480"/>
-          </a:xfrm>
-          <a:prstGeom prst="rect">
-            <a:avLst/>
-          </a:prstGeom>
-          <a:solidFill>
-            <a:srgbClr val="FDE9CE"/>
-          </a:solidFill>
-          <a:ln>
-            <a:noFill/>
-          </a:ln>
-          <a:effectLst/>
-        </p:spPr>
-        <p:style>
-          <a:lnRef idx="1">
-            <a:schemeClr val="accent1"/>
-          </a:lnRef>
-          <a:fillRef idx="3">
-            <a:schemeClr val="accent1"/>
-          </a:fillRef>
-          <a:effectRef idx="2">
-            <a:schemeClr val="accent1"/>
-          </a:effectRef>
-          <a:fontRef idx="minor">
-            <a:schemeClr val="lt1"/>
-          </a:fontRef>
-        </p:style>
-        <p:txBody>
-          <a:bodyPr rtlCol="0" anchor="ctr"/>
-          <a:lstStyle/>
-          <a:p>
-            <a:pPr algn="ctr"/>
-          </a:p>
-        </p:txBody>
-      </p:sp>
-      <p:sp>
-        <p:nvSpPr>
-          <p:cNvPr id="43" name="TextBox 42"/>
-          <p:cNvSpPr txBox="1"/>
-          <p:nvPr/>
-        </p:nvSpPr>
-        <p:spPr>
-          <a:xfrm>
-            <a:off x="10835640" y="3557016"/>
-            <a:ext cx="822960" cy="338328"/>
-          </a:xfrm>
-          <a:prstGeom prst="rect">
-            <a:avLst/>
-          </a:prstGeom>
-          <a:noFill/>
-        </p:spPr>
-        <p:txBody>
-          <a:bodyPr wrap="square" anchor="ctr" lIns="0" rIns="0" tIns="0" bIns="0">
-            <a:spAutoFit/>
-          </a:bodyPr>
-          <a:lstStyle/>
-          <a:p>
-            <a:pPr algn="l"/>
-            <a:r>
-              <a:rPr sz="1200" b="1">
-                <a:solidFill>
-                  <a:srgbClr val="C8102E"/>
-                </a:solidFill>
-                <a:latin typeface="Yu Gothic"/>
-                <a:ea typeface="Yu Gothic"/>
-              </a:rPr>
-              <a:t>7.28</a:t>
-            </a:r>
-          </a:p>
-        </p:txBody>
-      </p:sp>
-      <p:sp>
-        <p:nvSpPr>
-          <p:cNvPr id="44" name="TextBox 43"/>
-          <p:cNvSpPr txBox="1"/>
-          <p:nvPr/>
-        </p:nvSpPr>
-        <p:spPr>
-          <a:xfrm>
-            <a:off x="6858000" y="4206240"/>
-            <a:ext cx="5029200" cy="365760"/>
+            <a:off x="365760" y="6080760"/>
+            <a:ext cx="11430000" cy="731520"/>
           </a:xfrm>
           <a:prstGeom prst="rect">
             <a:avLst/>
@@ -11247,128 +12746,40 @@
           <a:p>
             <a:pPr algn="l"/>
             <a:r>
-              <a:rPr sz="1500" b="1">
-                <a:solidFill>
-                  <a:srgbClr val="003B71"/>
-                </a:solidFill>
-                <a:latin typeface="Yu Gothic"/>
-                <a:ea typeface="Yu Gothic"/>
-              </a:rPr>
-              <a:t>■ ポイント</a:t>
-            </a:r>
-          </a:p>
-        </p:txBody>
-      </p:sp>
-      <p:sp>
-        <p:nvSpPr>
-          <p:cNvPr id="45" name="TextBox 44"/>
-          <p:cNvSpPr txBox="1"/>
-          <p:nvPr/>
-        </p:nvSpPr>
-        <p:spPr>
-          <a:xfrm>
-            <a:off x="6858000" y="4572000"/>
-            <a:ext cx="5029200" cy="1645920"/>
-          </a:xfrm>
-          <a:prstGeom prst="rect">
-            <a:avLst/>
-          </a:prstGeom>
-          <a:noFill/>
-        </p:spPr>
-        <p:txBody>
-          <a:bodyPr wrap="square" anchor="t" lIns="0" rIns="0" tIns="0" bIns="0">
-            <a:spAutoFit/>
-          </a:bodyPr>
-          <a:lstStyle/>
-          <a:p>
-            <a:pPr algn="l"/>
-            <a:r>
-              <a:rPr sz="1250" b="0">
+              <a:rPr sz="1150" b="0">
                 <a:solidFill>
                   <a:srgbClr val="5A5A5A"/>
                 </a:solidFill>
                 <a:latin typeface="Yu Gothic"/>
                 <a:ea typeface="Yu Gothic"/>
               </a:rPr>
-              <a:t>・C (Hybrid) は B より MAE 10%改善</a:t>
-            </a:r>
-          </a:p>
-          <a:p>
-            <a:pPr algn="l"/>
-            <a:r>
-              <a:rPr sz="1250" b="0">
+              <a:t>・PC1 (41.7%) = 「熱関連成分」気温・体感・WBGT が共に寄与   →  b00 と +0.47 の相関</a:t>
+            </a:r>
+          </a:p>
+          <a:p>
+            <a:pPr algn="l"/>
+            <a:r>
+              <a:rPr sz="1150" b="0">
                 <a:solidFill>
                   <a:srgbClr val="5A5A5A"/>
                 </a:solidFill>
                 <a:latin typeface="Yu Gothic"/>
                 <a:ea typeface="Yu Gothic"/>
               </a:rPr>
-              <a:t>  (59.7 → 54.0 kW)</a:t>
-            </a:r>
-          </a:p>
-          <a:p>
-            <a:pPr algn="l"/>
-            <a:r>
-              <a:rPr sz="1250" b="0">
+              <a:t>・PC2 (21.1%) = 「湿度・日射成分」湿度↑かつ日射↓ (悪天候)   →  b00 と −0.50 の相関</a:t>
+            </a:r>
+          </a:p>
+          <a:p>
+            <a:pPr algn="l"/>
+            <a:r>
+              <a:rPr sz="1150" b="0">
                 <a:solidFill>
                   <a:srgbClr val="5A5A5A"/>
                 </a:solidFill>
                 <a:latin typeface="Yu Gothic"/>
                 <a:ea typeface="Yu Gothic"/>
               </a:rPr>
-              <a:t/>
-            </a:r>
-          </a:p>
-          <a:p>
-            <a:pPr algn="l"/>
-            <a:r>
-              <a:rPr sz="1250" b="0">
-                <a:solidFill>
-                  <a:srgbClr val="5A5A5A"/>
-                </a:solidFill>
-                <a:latin typeface="Yu Gothic"/>
-                <a:ea typeface="Yu Gothic"/>
-              </a:rPr>
-              <a:t>・A (上限) との差はわずか 6%</a:t>
-            </a:r>
-          </a:p>
-          <a:p>
-            <a:pPr algn="l"/>
-            <a:r>
-              <a:rPr sz="1250" b="0">
-                <a:solidFill>
-                  <a:srgbClr val="5A5A5A"/>
-                </a:solidFill>
-                <a:latin typeface="Yu Gothic"/>
-                <a:ea typeface="Yu Gothic"/>
-              </a:rPr>
-              <a:t>  (50.7 → 54.0 kW)</a:t>
-            </a:r>
-          </a:p>
-          <a:p>
-            <a:pPr algn="l"/>
-            <a:r>
-              <a:rPr sz="1250" b="0">
-                <a:solidFill>
-                  <a:srgbClr val="5A5A5A"/>
-                </a:solidFill>
-                <a:latin typeface="Yu Gothic"/>
-                <a:ea typeface="Yu Gothic"/>
-              </a:rPr>
-              <a:t/>
-            </a:r>
-          </a:p>
-          <a:p>
-            <a:pPr algn="l"/>
-            <a:r>
-              <a:rPr sz="1250" b="0">
-                <a:solidFill>
-                  <a:srgbClr val="5A5A5A"/>
-                </a:solidFill>
-                <a:latin typeface="Yu Gothic"/>
-                <a:ea typeface="Yu Gothic"/>
-              </a:rPr>
-              <a:t>・上限値に迫る精度を実運用で実現</a:t>
+              <a:t>・PC3 (13.1%) = 「風・降水成分」 (b00 への影響は小)</a:t>
             </a:r>
           </a:p>
         </p:txBody>
@@ -11502,7 +12913,7 @@
                 <a:latin typeface="Yu Gothic"/>
                 <a:ea typeface="Yu Gothic"/>
               </a:rPr>
-              <a:t>Slide 9 / 10</a:t>
+              <a:t>Slide 9 / 12</a:t>
             </a:r>
           </a:p>
         </p:txBody>
@@ -11618,7 +13029,7 @@
                 <a:latin typeface="Yu Gothic"/>
                 <a:ea typeface="Yu Gothic"/>
               </a:rPr>
-              <a:t>結果③ 何が予測を決めているか</a:t>
+              <a:t>結果① テスト期間の予測</a:t>
             </a:r>
           </a:p>
         </p:txBody>
@@ -11698,14 +13109,14 @@
                 <a:latin typeface="Yu Gothic"/>
                 <a:ea typeface="Yu Gothic"/>
               </a:rPr>
-              <a:t>SHAP値で見る上位特徴量</a:t>
+              <a:t>提案手法 (Hybrid):  MAE = 54.0 kW,  R² = 0.905,  MAPE = 7.28%</a:t>
             </a:r>
           </a:p>
         </p:txBody>
       </p:sp>
       <p:pic>
         <p:nvPicPr>
-          <p:cNvPr id="10" name="Picture 9" descr="pres_06_shap_top10.png"/>
+          <p:cNvPr id="10" name="Picture 9" descr="pres_04_holdout_timeseries.png"/>
           <p:cNvPicPr>
             <a:picLocks noChangeAspect="1"/>
           </p:cNvPicPr>
@@ -11719,8 +13130,8 @@
         </p:blipFill>
         <p:spPr>
           <a:xfrm>
-            <a:off x="365760" y="1828800"/>
-            <a:ext cx="7315200" cy="4114800"/>
+            <a:off x="365760" y="1737360"/>
+            <a:ext cx="11430000" cy="4675909"/>
           </a:xfrm>
           <a:prstGeom prst="rect">
             <a:avLst/>
@@ -11735,8 +13146,8 @@
         </p:nvSpPr>
         <p:spPr>
           <a:xfrm>
-            <a:off x="7863840" y="1828800"/>
-            <a:ext cx="4114800" cy="365760"/>
+            <a:off x="365760" y="5760720"/>
+            <a:ext cx="11430000" cy="365760"/>
           </a:xfrm>
           <a:prstGeom prst="rect">
             <a:avLst/>
@@ -11751,14 +13162,14 @@
           <a:p>
             <a:pPr algn="l"/>
             <a:r>
-              <a:rPr sz="1500" b="1">
+              <a:rPr sz="1300" b="1">
                 <a:solidFill>
                   <a:srgbClr val="003B71"/>
                 </a:solidFill>
                 <a:latin typeface="Yu Gothic"/>
                 <a:ea typeface="Yu Gothic"/>
               </a:rPr>
-              <a:t>■ 解釈</a:t>
+              <a:t>■ 青: 実測値    オレンジ: 予測値    赤点線: P80閾値 (SDR発令検討基準)</a:t>
             </a:r>
           </a:p>
         </p:txBody>
@@ -11771,8 +13182,8 @@
         </p:nvSpPr>
         <p:spPr>
           <a:xfrm>
-            <a:off x="7863840" y="2286000"/>
-            <a:ext cx="4114800" cy="4114800"/>
+            <a:off x="365760" y="6217920"/>
+            <a:ext cx="11430000" cy="457200"/>
           </a:xfrm>
           <a:prstGeom prst="rect">
             <a:avLst/>
@@ -11787,144 +13198,14 @@
           <a:p>
             <a:pPr algn="l"/>
             <a:r>
-              <a:rPr sz="1250" b="0">
+              <a:rPr sz="1200" b="0">
                 <a:solidFill>
                   <a:srgbClr val="5A5A5A"/>
                 </a:solidFill>
                 <a:latin typeface="Yu Gothic"/>
                 <a:ea typeface="Yu Gothic"/>
               </a:rPr>
-              <a:t>1. 前週同時刻の負荷が最重要</a:t>
-            </a:r>
-          </a:p>
-          <a:p>
-            <a:pPr algn="l"/>
-            <a:r>
-              <a:rPr sz="1250" b="0">
-                <a:solidFill>
-                  <a:srgbClr val="5A5A5A"/>
-                </a:solidFill>
-                <a:latin typeface="Yu Gothic"/>
-                <a:ea typeface="Yu Gothic"/>
-              </a:rPr>
-              <a:t>    → 週周期パターンが強い</a:t>
-            </a:r>
-          </a:p>
-          <a:p>
-            <a:pPr algn="l"/>
-            <a:r>
-              <a:rPr sz="1250" b="0">
-                <a:solidFill>
-                  <a:srgbClr val="5A5A5A"/>
-                </a:solidFill>
-                <a:latin typeface="Yu Gothic"/>
-                <a:ea typeface="Yu Gothic"/>
-              </a:rPr>
-              <a:t/>
-            </a:r>
-          </a:p>
-          <a:p>
-            <a:pPr algn="l"/>
-            <a:r>
-              <a:rPr sz="1250" b="0">
-                <a:solidFill>
-                  <a:srgbClr val="5A5A5A"/>
-                </a:solidFill>
-                <a:latin typeface="Yu Gothic"/>
-                <a:ea typeface="Yu Gothic"/>
-              </a:rPr>
-              <a:t>2. 営業日 / 休日フラグ</a:t>
-            </a:r>
-          </a:p>
-          <a:p>
-            <a:pPr algn="l"/>
-            <a:r>
-              <a:rPr sz="1250" b="0">
-                <a:solidFill>
-                  <a:srgbClr val="5A5A5A"/>
-                </a:solidFill>
-                <a:latin typeface="Yu Gothic"/>
-                <a:ea typeface="Yu Gothic"/>
-              </a:rPr>
-              <a:t>    → 平日と休日で大差</a:t>
-            </a:r>
-          </a:p>
-          <a:p>
-            <a:pPr algn="l"/>
-            <a:r>
-              <a:rPr sz="1250" b="0">
-                <a:solidFill>
-                  <a:srgbClr val="5A5A5A"/>
-                </a:solidFill>
-                <a:latin typeface="Yu Gothic"/>
-                <a:ea typeface="Yu Gothic"/>
-              </a:rPr>
-              <a:t/>
-            </a:r>
-          </a:p>
-          <a:p>
-            <a:pPr algn="l"/>
-            <a:r>
-              <a:rPr sz="1250" b="0">
-                <a:solidFill>
-                  <a:srgbClr val="5A5A5A"/>
-                </a:solidFill>
-                <a:latin typeface="Yu Gothic"/>
-                <a:ea typeface="Yu Gothic"/>
-              </a:rPr>
-              <a:t>3. 前日同時刻の気温</a:t>
-            </a:r>
-          </a:p>
-          <a:p>
-            <a:pPr algn="l"/>
-            <a:r>
-              <a:rPr sz="1250" b="0">
-                <a:solidFill>
-                  <a:srgbClr val="5A5A5A"/>
-                </a:solidFill>
-                <a:latin typeface="Yu Gothic"/>
-                <a:ea typeface="Yu Gothic"/>
-              </a:rPr>
-              <a:t>    → 暑熱の連続性を反映</a:t>
-            </a:r>
-          </a:p>
-          <a:p>
-            <a:pPr algn="l"/>
-            <a:r>
-              <a:rPr sz="1250" b="0">
-                <a:solidFill>
-                  <a:srgbClr val="5A5A5A"/>
-                </a:solidFill>
-                <a:latin typeface="Yu Gothic"/>
-                <a:ea typeface="Yu Gothic"/>
-              </a:rPr>
-              <a:t/>
-            </a:r>
-          </a:p>
-          <a:p>
-            <a:pPr algn="l"/>
-            <a:r>
-              <a:rPr sz="1250" b="0">
-                <a:solidFill>
-                  <a:srgbClr val="5A5A5A"/>
-                </a:solidFill>
-                <a:latin typeface="Yu Gothic"/>
-                <a:ea typeface="Yu Gothic"/>
-              </a:rPr>
-              <a:t>4. 日射量 (予報)</a:t>
-            </a:r>
-          </a:p>
-          <a:p>
-            <a:pPr algn="l"/>
-            <a:r>
-              <a:rPr sz="1250" b="0">
-                <a:solidFill>
-                  <a:srgbClr val="5A5A5A"/>
-                </a:solidFill>
-                <a:latin typeface="Yu Gothic"/>
-                <a:ea typeface="Yu Gothic"/>
-              </a:rPr>
-              <a:t>    → 翌日の冷房需要を予測</a:t>
+              <a:t>・予測線は実測線を概ね追従。複数のピーク日 (10/07, 10/14, 10/22) を正しく捕捉。</a:t>
             </a:r>
           </a:p>
         </p:txBody>
